--- a/slides/searchlens_presentation.pptx
+++ b/slides/searchlens_presentation.pptx
@@ -5,32 +5,33 @@
     <p:sldMasterId id="2147483648" r:id="rId1"/>
   </p:sldMasterIdLst>
   <p:sldIdLst>
-    <p:sldId id="256" r:id="rId7"/>
-    <p:sldId id="257" r:id="rId8"/>
-    <p:sldId id="258" r:id="rId9"/>
-    <p:sldId id="259" r:id="rId10"/>
-    <p:sldId id="260" r:id="rId11"/>
-    <p:sldId id="261" r:id="rId12"/>
-    <p:sldId id="262" r:id="rId13"/>
-    <p:sldId id="263" r:id="rId14"/>
-    <p:sldId id="264" r:id="rId15"/>
-    <p:sldId id="265" r:id="rId16"/>
-    <p:sldId id="266" r:id="rId17"/>
-    <p:sldId id="267" r:id="rId18"/>
-    <p:sldId id="268" r:id="rId19"/>
-    <p:sldId id="269" r:id="rId20"/>
-    <p:sldId id="270" r:id="rId21"/>
-    <p:sldId id="271" r:id="rId22"/>
-    <p:sldId id="272" r:id="rId23"/>
-    <p:sldId id="273" r:id="rId24"/>
-    <p:sldId id="274" r:id="rId25"/>
-    <p:sldId id="275" r:id="rId26"/>
-    <p:sldId id="276" r:id="rId27"/>
-    <p:sldId id="277" r:id="rId28"/>
-    <p:sldId id="278" r:id="rId29"/>
-    <p:sldId id="279" r:id="rId30"/>
+    <p:sldId id="256" r:id="rId2"/>
+    <p:sldId id="257" r:id="rId3"/>
+    <p:sldId id="258" r:id="rId4"/>
+    <p:sldId id="259" r:id="rId5"/>
+    <p:sldId id="260" r:id="rId6"/>
+    <p:sldId id="261" r:id="rId7"/>
+    <p:sldId id="262" r:id="rId8"/>
+    <p:sldId id="263" r:id="rId9"/>
+    <p:sldId id="264" r:id="rId10"/>
+    <p:sldId id="265" r:id="rId11"/>
+    <p:sldId id="266" r:id="rId12"/>
+    <p:sldId id="267" r:id="rId13"/>
+    <p:sldId id="268" r:id="rId14"/>
+    <p:sldId id="269" r:id="rId15"/>
+    <p:sldId id="270" r:id="rId16"/>
+    <p:sldId id="271" r:id="rId17"/>
+    <p:sldId id="272" r:id="rId18"/>
+    <p:sldId id="273" r:id="rId19"/>
+    <p:sldId id="274" r:id="rId20"/>
+    <p:sldId id="275" r:id="rId21"/>
+    <p:sldId id="276" r:id="rId22"/>
+    <p:sldId id="277" r:id="rId23"/>
+    <p:sldId id="278" r:id="rId24"/>
+    <p:sldId id="279" r:id="rId25"/>
+    <p:sldId id="280" r:id="rId26"/>
   </p:sldIdLst>
-  <p:sldSz cx="12191695" cy="6858000" type="screen4x3"/>
+  <p:sldSz cx="12192000" cy="6858000"/>
   <p:notesSz cx="6858000" cy="9144000"/>
   <p:defaultTextStyle>
     <a:defPPr>
@@ -127,6 +128,22 @@
       </a:defRPr>
     </a:lvl9pPr>
   </p:defaultTextStyle>
+  <p:extLst>
+    <p:ext uri="{EFAFB233-063F-42B5-8137-9DF3F51BA10A}">
+      <p15:sldGuideLst xmlns:p15="http://schemas.microsoft.com/office/powerpoint/2012/main">
+        <p15:guide id="1" orient="horz" pos="2160">
+          <p15:clr>
+            <a:srgbClr val="A4A3A4"/>
+          </p15:clr>
+        </p15:guide>
+        <p15:guide id="2" pos="2880">
+          <p15:clr>
+            <a:srgbClr val="A4A3A4"/>
+          </p15:clr>
+        </p15:guide>
+      </p15:sldGuideLst>
+    </p:ext>
+  </p:extLst>
 </p:presentation>
 </file>
 
@@ -168,10 +185,9 @@
           <a:lstStyle/>
           <a:p>
             <a:r>
-              <a:rPr lang="en-US" smtClean="0"/>
+              <a:rPr lang="en-US"/>
               <a:t>Click to edit Master title style</a:t>
             </a:r>
-            <a:endParaRPr lang="en-US"/>
           </a:p>
         </p:txBody>
       </p:sp>
@@ -287,10 +303,9 @@
           </a:lstStyle>
           <a:p>
             <a:r>
-              <a:rPr lang="en-US" smtClean="0"/>
+              <a:rPr lang="en-US"/>
               <a:t>Click to edit Master subtitle style</a:t>
             </a:r>
-            <a:endParaRPr lang="en-US"/>
           </a:p>
         </p:txBody>
       </p:sp>
@@ -311,7 +326,7 @@
           <a:p>
             <a:fld id="{5BCAD085-E8A6-8845-BD4E-CB4CCA059FC4}" type="datetimeFigureOut">
               <a:rPr lang="en-US" smtClean="0"/>
-              <a:t>1/27/13</a:t>
+              <a:t>5/6/26</a:t>
             </a:fld>
             <a:endParaRPr lang="en-US"/>
           </a:p>
@@ -405,10 +420,9 @@
           <a:lstStyle/>
           <a:p>
             <a:r>
-              <a:rPr lang="en-US" smtClean="0"/>
+              <a:rPr lang="en-US"/>
               <a:t>Click to edit Master title style</a:t>
             </a:r>
-            <a:endParaRPr lang="en-US"/>
           </a:p>
         </p:txBody>
       </p:sp>
@@ -429,38 +443,37 @@
           <a:p>
             <a:pPr lvl="0"/>
             <a:r>
-              <a:rPr lang="en-US" smtClean="0"/>
+              <a:rPr lang="en-US"/>
               <a:t>Click to edit Master text styles</a:t>
             </a:r>
           </a:p>
           <a:p>
             <a:pPr lvl="1"/>
             <a:r>
-              <a:rPr lang="en-US" smtClean="0"/>
+              <a:rPr lang="en-US"/>
               <a:t>Second level</a:t>
             </a:r>
           </a:p>
           <a:p>
             <a:pPr lvl="2"/>
             <a:r>
-              <a:rPr lang="en-US" smtClean="0"/>
+              <a:rPr lang="en-US"/>
               <a:t>Third level</a:t>
             </a:r>
           </a:p>
           <a:p>
             <a:pPr lvl="3"/>
             <a:r>
-              <a:rPr lang="en-US" smtClean="0"/>
+              <a:rPr lang="en-US"/>
               <a:t>Fourth level</a:t>
             </a:r>
           </a:p>
           <a:p>
             <a:pPr lvl="4"/>
             <a:r>
-              <a:rPr lang="en-US" smtClean="0"/>
+              <a:rPr lang="en-US"/>
               <a:t>Fifth level</a:t>
             </a:r>
-            <a:endParaRPr lang="en-US"/>
           </a:p>
         </p:txBody>
       </p:sp>
@@ -481,7 +494,7 @@
           <a:p>
             <a:fld id="{5BCAD085-E8A6-8845-BD4E-CB4CCA059FC4}" type="datetimeFigureOut">
               <a:rPr lang="en-US" smtClean="0"/>
-              <a:t>1/27/13</a:t>
+              <a:t>5/6/26</a:t>
             </a:fld>
             <a:endParaRPr lang="en-US"/>
           </a:p>
@@ -580,10 +593,9 @@
           <a:lstStyle/>
           <a:p>
             <a:r>
-              <a:rPr lang="en-US" smtClean="0"/>
+              <a:rPr lang="en-US"/>
               <a:t>Click to edit Master title style</a:t>
             </a:r>
-            <a:endParaRPr lang="en-US"/>
           </a:p>
         </p:txBody>
       </p:sp>
@@ -609,38 +621,37 @@
           <a:p>
             <a:pPr lvl="0"/>
             <a:r>
-              <a:rPr lang="en-US" smtClean="0"/>
+              <a:rPr lang="en-US"/>
               <a:t>Click to edit Master text styles</a:t>
             </a:r>
           </a:p>
           <a:p>
             <a:pPr lvl="1"/>
             <a:r>
-              <a:rPr lang="en-US" smtClean="0"/>
+              <a:rPr lang="en-US"/>
               <a:t>Second level</a:t>
             </a:r>
           </a:p>
           <a:p>
             <a:pPr lvl="2"/>
             <a:r>
-              <a:rPr lang="en-US" smtClean="0"/>
+              <a:rPr lang="en-US"/>
               <a:t>Third level</a:t>
             </a:r>
           </a:p>
           <a:p>
             <a:pPr lvl="3"/>
             <a:r>
-              <a:rPr lang="en-US" smtClean="0"/>
+              <a:rPr lang="en-US"/>
               <a:t>Fourth level</a:t>
             </a:r>
           </a:p>
           <a:p>
             <a:pPr lvl="4"/>
             <a:r>
-              <a:rPr lang="en-US" smtClean="0"/>
+              <a:rPr lang="en-US"/>
               <a:t>Fifth level</a:t>
             </a:r>
-            <a:endParaRPr lang="en-US"/>
           </a:p>
         </p:txBody>
       </p:sp>
@@ -661,7 +672,7 @@
           <a:p>
             <a:fld id="{5BCAD085-E8A6-8845-BD4E-CB4CCA059FC4}" type="datetimeFigureOut">
               <a:rPr lang="en-US" smtClean="0"/>
-              <a:t>1/27/13</a:t>
+              <a:t>5/6/26</a:t>
             </a:fld>
             <a:endParaRPr lang="en-US"/>
           </a:p>
@@ -755,10 +766,9 @@
           <a:lstStyle/>
           <a:p>
             <a:r>
-              <a:rPr lang="en-US" smtClean="0"/>
+              <a:rPr lang="en-US"/>
               <a:t>Click to edit Master title style</a:t>
             </a:r>
-            <a:endParaRPr lang="en-US"/>
           </a:p>
         </p:txBody>
       </p:sp>
@@ -779,38 +789,37 @@
           <a:p>
             <a:pPr lvl="0"/>
             <a:r>
-              <a:rPr lang="en-US" smtClean="0"/>
+              <a:rPr lang="en-US"/>
               <a:t>Click to edit Master text styles</a:t>
             </a:r>
           </a:p>
           <a:p>
             <a:pPr lvl="1"/>
             <a:r>
-              <a:rPr lang="en-US" smtClean="0"/>
+              <a:rPr lang="en-US"/>
               <a:t>Second level</a:t>
             </a:r>
           </a:p>
           <a:p>
             <a:pPr lvl="2"/>
             <a:r>
-              <a:rPr lang="en-US" smtClean="0"/>
+              <a:rPr lang="en-US"/>
               <a:t>Third level</a:t>
             </a:r>
           </a:p>
           <a:p>
             <a:pPr lvl="3"/>
             <a:r>
-              <a:rPr lang="en-US" smtClean="0"/>
+              <a:rPr lang="en-US"/>
               <a:t>Fourth level</a:t>
             </a:r>
           </a:p>
           <a:p>
             <a:pPr lvl="4"/>
             <a:r>
-              <a:rPr lang="en-US" smtClean="0"/>
+              <a:rPr lang="en-US"/>
               <a:t>Fifth level</a:t>
             </a:r>
-            <a:endParaRPr lang="en-US"/>
           </a:p>
         </p:txBody>
       </p:sp>
@@ -831,7 +840,7 @@
           <a:p>
             <a:fld id="{5BCAD085-E8A6-8845-BD4E-CB4CCA059FC4}" type="datetimeFigureOut">
               <a:rPr lang="en-US" smtClean="0"/>
-              <a:t>1/27/13</a:t>
+              <a:t>5/6/26</a:t>
             </a:fld>
             <a:endParaRPr lang="en-US"/>
           </a:p>
@@ -934,10 +943,9 @@
           </a:lstStyle>
           <a:p>
             <a:r>
-              <a:rPr lang="en-US" smtClean="0"/>
+              <a:rPr lang="en-US"/>
               <a:t>Click to edit Master title style</a:t>
             </a:r>
-            <a:endParaRPr lang="en-US"/>
           </a:p>
         </p:txBody>
       </p:sp>
@@ -1054,7 +1062,7 @@
           <a:p>
             <a:pPr lvl="0"/>
             <a:r>
-              <a:rPr lang="en-US" smtClean="0"/>
+              <a:rPr lang="en-US"/>
               <a:t>Click to edit Master text styles</a:t>
             </a:r>
           </a:p>
@@ -1077,7 +1085,7 @@
           <a:p>
             <a:fld id="{5BCAD085-E8A6-8845-BD4E-CB4CCA059FC4}" type="datetimeFigureOut">
               <a:rPr lang="en-US" smtClean="0"/>
-              <a:t>1/27/13</a:t>
+              <a:t>5/6/26</a:t>
             </a:fld>
             <a:endParaRPr lang="en-US"/>
           </a:p>
@@ -1171,10 +1179,9 @@
           <a:lstStyle/>
           <a:p>
             <a:r>
-              <a:rPr lang="en-US" smtClean="0"/>
+              <a:rPr lang="en-US"/>
               <a:t>Click to edit Master title style</a:t>
             </a:r>
-            <a:endParaRPr lang="en-US"/>
           </a:p>
         </p:txBody>
       </p:sp>
@@ -1228,38 +1235,37 @@
           <a:p>
             <a:pPr lvl="0"/>
             <a:r>
-              <a:rPr lang="en-US" smtClean="0"/>
+              <a:rPr lang="en-US"/>
               <a:t>Click to edit Master text styles</a:t>
             </a:r>
           </a:p>
           <a:p>
             <a:pPr lvl="1"/>
             <a:r>
-              <a:rPr lang="en-US" smtClean="0"/>
+              <a:rPr lang="en-US"/>
               <a:t>Second level</a:t>
             </a:r>
           </a:p>
           <a:p>
             <a:pPr lvl="2"/>
             <a:r>
-              <a:rPr lang="en-US" smtClean="0"/>
+              <a:rPr lang="en-US"/>
               <a:t>Third level</a:t>
             </a:r>
           </a:p>
           <a:p>
             <a:pPr lvl="3"/>
             <a:r>
-              <a:rPr lang="en-US" smtClean="0"/>
+              <a:rPr lang="en-US"/>
               <a:t>Fourth level</a:t>
             </a:r>
           </a:p>
           <a:p>
             <a:pPr lvl="4"/>
             <a:r>
-              <a:rPr lang="en-US" smtClean="0"/>
+              <a:rPr lang="en-US"/>
               <a:t>Fifth level</a:t>
             </a:r>
-            <a:endParaRPr lang="en-US"/>
           </a:p>
         </p:txBody>
       </p:sp>
@@ -1313,38 +1319,37 @@
           <a:p>
             <a:pPr lvl="0"/>
             <a:r>
-              <a:rPr lang="en-US" smtClean="0"/>
+              <a:rPr lang="en-US"/>
               <a:t>Click to edit Master text styles</a:t>
             </a:r>
           </a:p>
           <a:p>
             <a:pPr lvl="1"/>
             <a:r>
-              <a:rPr lang="en-US" smtClean="0"/>
+              <a:rPr lang="en-US"/>
               <a:t>Second level</a:t>
             </a:r>
           </a:p>
           <a:p>
             <a:pPr lvl="2"/>
             <a:r>
-              <a:rPr lang="en-US" smtClean="0"/>
+              <a:rPr lang="en-US"/>
               <a:t>Third level</a:t>
             </a:r>
           </a:p>
           <a:p>
             <a:pPr lvl="3"/>
             <a:r>
-              <a:rPr lang="en-US" smtClean="0"/>
+              <a:rPr lang="en-US"/>
               <a:t>Fourth level</a:t>
             </a:r>
           </a:p>
           <a:p>
             <a:pPr lvl="4"/>
             <a:r>
-              <a:rPr lang="en-US" smtClean="0"/>
+              <a:rPr lang="en-US"/>
               <a:t>Fifth level</a:t>
             </a:r>
-            <a:endParaRPr lang="en-US"/>
           </a:p>
         </p:txBody>
       </p:sp>
@@ -1365,7 +1370,7 @@
           <a:p>
             <a:fld id="{5BCAD085-E8A6-8845-BD4E-CB4CCA059FC4}" type="datetimeFigureOut">
               <a:rPr lang="en-US" smtClean="0"/>
-              <a:t>1/27/13</a:t>
+              <a:t>5/6/26</a:t>
             </a:fld>
             <a:endParaRPr lang="en-US"/>
           </a:p>
@@ -1463,10 +1468,9 @@
           </a:lstStyle>
           <a:p>
             <a:r>
-              <a:rPr lang="en-US" smtClean="0"/>
+              <a:rPr lang="en-US"/>
               <a:t>Click to edit Master title style</a:t>
             </a:r>
-            <a:endParaRPr lang="en-US"/>
           </a:p>
         </p:txBody>
       </p:sp>
@@ -1529,7 +1533,7 @@
           <a:p>
             <a:pPr lvl="0"/>
             <a:r>
-              <a:rPr lang="en-US" smtClean="0"/>
+              <a:rPr lang="en-US"/>
               <a:t>Click to edit Master text styles</a:t>
             </a:r>
           </a:p>
@@ -1585,38 +1589,37 @@
           <a:p>
             <a:pPr lvl="0"/>
             <a:r>
-              <a:rPr lang="en-US" smtClean="0"/>
+              <a:rPr lang="en-US"/>
               <a:t>Click to edit Master text styles</a:t>
             </a:r>
           </a:p>
           <a:p>
             <a:pPr lvl="1"/>
             <a:r>
-              <a:rPr lang="en-US" smtClean="0"/>
+              <a:rPr lang="en-US"/>
               <a:t>Second level</a:t>
             </a:r>
           </a:p>
           <a:p>
             <a:pPr lvl="2"/>
             <a:r>
-              <a:rPr lang="en-US" smtClean="0"/>
+              <a:rPr lang="en-US"/>
               <a:t>Third level</a:t>
             </a:r>
           </a:p>
           <a:p>
             <a:pPr lvl="3"/>
             <a:r>
-              <a:rPr lang="en-US" smtClean="0"/>
+              <a:rPr lang="en-US"/>
               <a:t>Fourth level</a:t>
             </a:r>
           </a:p>
           <a:p>
             <a:pPr lvl="4"/>
             <a:r>
-              <a:rPr lang="en-US" smtClean="0"/>
+              <a:rPr lang="en-US"/>
               <a:t>Fifth level</a:t>
             </a:r>
-            <a:endParaRPr lang="en-US"/>
           </a:p>
         </p:txBody>
       </p:sp>
@@ -1679,7 +1682,7 @@
           <a:p>
             <a:pPr lvl="0"/>
             <a:r>
-              <a:rPr lang="en-US" smtClean="0"/>
+              <a:rPr lang="en-US"/>
               <a:t>Click to edit Master text styles</a:t>
             </a:r>
           </a:p>
@@ -1735,38 +1738,37 @@
           <a:p>
             <a:pPr lvl="0"/>
             <a:r>
-              <a:rPr lang="en-US" smtClean="0"/>
+              <a:rPr lang="en-US"/>
               <a:t>Click to edit Master text styles</a:t>
             </a:r>
           </a:p>
           <a:p>
             <a:pPr lvl="1"/>
             <a:r>
-              <a:rPr lang="en-US" smtClean="0"/>
+              <a:rPr lang="en-US"/>
               <a:t>Second level</a:t>
             </a:r>
           </a:p>
           <a:p>
             <a:pPr lvl="2"/>
             <a:r>
-              <a:rPr lang="en-US" smtClean="0"/>
+              <a:rPr lang="en-US"/>
               <a:t>Third level</a:t>
             </a:r>
           </a:p>
           <a:p>
             <a:pPr lvl="3"/>
             <a:r>
-              <a:rPr lang="en-US" smtClean="0"/>
+              <a:rPr lang="en-US"/>
               <a:t>Fourth level</a:t>
             </a:r>
           </a:p>
           <a:p>
             <a:pPr lvl="4"/>
             <a:r>
-              <a:rPr lang="en-US" smtClean="0"/>
+              <a:rPr lang="en-US"/>
               <a:t>Fifth level</a:t>
             </a:r>
-            <a:endParaRPr lang="en-US"/>
           </a:p>
         </p:txBody>
       </p:sp>
@@ -1787,7 +1789,7 @@
           <a:p>
             <a:fld id="{5BCAD085-E8A6-8845-BD4E-CB4CCA059FC4}" type="datetimeFigureOut">
               <a:rPr lang="en-US" smtClean="0"/>
-              <a:t>1/27/13</a:t>
+              <a:t>5/6/26</a:t>
             </a:fld>
             <a:endParaRPr lang="en-US"/>
           </a:p>
@@ -1881,10 +1883,9 @@
           <a:lstStyle/>
           <a:p>
             <a:r>
-              <a:rPr lang="en-US" smtClean="0"/>
+              <a:rPr lang="en-US"/>
               <a:t>Click to edit Master title style</a:t>
             </a:r>
-            <a:endParaRPr lang="en-US"/>
           </a:p>
         </p:txBody>
       </p:sp>
@@ -1905,7 +1906,7 @@
           <a:p>
             <a:fld id="{5BCAD085-E8A6-8845-BD4E-CB4CCA059FC4}" type="datetimeFigureOut">
               <a:rPr lang="en-US" smtClean="0"/>
-              <a:t>1/27/13</a:t>
+              <a:t>5/6/26</a:t>
             </a:fld>
             <a:endParaRPr lang="en-US"/>
           </a:p>
@@ -2000,7 +2001,7 @@
           <a:p>
             <a:fld id="{5BCAD085-E8A6-8845-BD4E-CB4CCA059FC4}" type="datetimeFigureOut">
               <a:rPr lang="en-US" smtClean="0"/>
-              <a:t>1/27/13</a:t>
+              <a:t>5/6/26</a:t>
             </a:fld>
             <a:endParaRPr lang="en-US"/>
           </a:p>
@@ -2103,10 +2104,9 @@
           </a:lstStyle>
           <a:p>
             <a:r>
-              <a:rPr lang="en-US" smtClean="0"/>
+              <a:rPr lang="en-US"/>
               <a:t>Click to edit Master title style</a:t>
             </a:r>
-            <a:endParaRPr lang="en-US"/>
           </a:p>
         </p:txBody>
       </p:sp>
@@ -2160,38 +2160,37 @@
           <a:p>
             <a:pPr lvl="0"/>
             <a:r>
-              <a:rPr lang="en-US" smtClean="0"/>
+              <a:rPr lang="en-US"/>
               <a:t>Click to edit Master text styles</a:t>
             </a:r>
           </a:p>
           <a:p>
             <a:pPr lvl="1"/>
             <a:r>
-              <a:rPr lang="en-US" smtClean="0"/>
+              <a:rPr lang="en-US"/>
               <a:t>Second level</a:t>
             </a:r>
           </a:p>
           <a:p>
             <a:pPr lvl="2"/>
             <a:r>
-              <a:rPr lang="en-US" smtClean="0"/>
+              <a:rPr lang="en-US"/>
               <a:t>Third level</a:t>
             </a:r>
           </a:p>
           <a:p>
             <a:pPr lvl="3"/>
             <a:r>
-              <a:rPr lang="en-US" smtClean="0"/>
+              <a:rPr lang="en-US"/>
               <a:t>Fourth level</a:t>
             </a:r>
           </a:p>
           <a:p>
             <a:pPr lvl="4"/>
             <a:r>
-              <a:rPr lang="en-US" smtClean="0"/>
+              <a:rPr lang="en-US"/>
               <a:t>Fifth level</a:t>
             </a:r>
-            <a:endParaRPr lang="en-US"/>
           </a:p>
         </p:txBody>
       </p:sp>
@@ -2254,7 +2253,7 @@
           <a:p>
             <a:pPr lvl="0"/>
             <a:r>
-              <a:rPr lang="en-US" smtClean="0"/>
+              <a:rPr lang="en-US"/>
               <a:t>Click to edit Master text styles</a:t>
             </a:r>
           </a:p>
@@ -2277,7 +2276,7 @@
           <a:p>
             <a:fld id="{5BCAD085-E8A6-8845-BD4E-CB4CCA059FC4}" type="datetimeFigureOut">
               <a:rPr lang="en-US" smtClean="0"/>
-              <a:t>1/27/13</a:t>
+              <a:t>5/6/26</a:t>
             </a:fld>
             <a:endParaRPr lang="en-US"/>
           </a:p>
@@ -2380,10 +2379,9 @@
           </a:lstStyle>
           <a:p>
             <a:r>
-              <a:rPr lang="en-US" smtClean="0"/>
+              <a:rPr lang="en-US"/>
               <a:t>Click to edit Master title style</a:t>
             </a:r>
-            <a:endParaRPr lang="en-US"/>
           </a:p>
         </p:txBody>
       </p:sp>
@@ -2507,7 +2505,7 @@
           <a:p>
             <a:pPr lvl="0"/>
             <a:r>
-              <a:rPr lang="en-US" smtClean="0"/>
+              <a:rPr lang="en-US"/>
               <a:t>Click to edit Master text styles</a:t>
             </a:r>
           </a:p>
@@ -2530,7 +2528,7 @@
           <a:p>
             <a:fld id="{5BCAD085-E8A6-8845-BD4E-CB4CCA059FC4}" type="datetimeFigureOut">
               <a:rPr lang="en-US" smtClean="0"/>
-              <a:t>1/27/13</a:t>
+              <a:t>5/6/26</a:t>
             </a:fld>
             <a:endParaRPr lang="en-US"/>
           </a:p>
@@ -2639,10 +2637,9 @@
           <a:lstStyle/>
           <a:p>
             <a:r>
-              <a:rPr lang="en-US" smtClean="0"/>
+              <a:rPr lang="en-US"/>
               <a:t>Click to edit Master title style</a:t>
             </a:r>
-            <a:endParaRPr lang="en-US"/>
           </a:p>
         </p:txBody>
       </p:sp>
@@ -2673,38 +2670,37 @@
           <a:p>
             <a:pPr lvl="0"/>
             <a:r>
-              <a:rPr lang="en-US" smtClean="0"/>
+              <a:rPr lang="en-US"/>
               <a:t>Click to edit Master text styles</a:t>
             </a:r>
           </a:p>
           <a:p>
             <a:pPr lvl="1"/>
             <a:r>
-              <a:rPr lang="en-US" smtClean="0"/>
+              <a:rPr lang="en-US"/>
               <a:t>Second level</a:t>
             </a:r>
           </a:p>
           <a:p>
             <a:pPr lvl="2"/>
             <a:r>
-              <a:rPr lang="en-US" smtClean="0"/>
+              <a:rPr lang="en-US"/>
               <a:t>Third level</a:t>
             </a:r>
           </a:p>
           <a:p>
             <a:pPr lvl="3"/>
             <a:r>
-              <a:rPr lang="en-US" smtClean="0"/>
+              <a:rPr lang="en-US"/>
               <a:t>Fourth level</a:t>
             </a:r>
           </a:p>
           <a:p>
             <a:pPr lvl="4"/>
             <a:r>
-              <a:rPr lang="en-US" smtClean="0"/>
+              <a:rPr lang="en-US"/>
               <a:t>Fifth level</a:t>
             </a:r>
-            <a:endParaRPr lang="en-US"/>
           </a:p>
         </p:txBody>
       </p:sp>
@@ -2743,7 +2739,7 @@
           <a:p>
             <a:fld id="{5BCAD085-E8A6-8845-BD4E-CB4CCA059FC4}" type="datetimeFigureOut">
               <a:rPr lang="en-US" smtClean="0"/>
-              <a:t>1/27/13</a:t>
+              <a:t>5/6/26</a:t>
             </a:fld>
             <a:endParaRPr lang="en-US"/>
           </a:p>
@@ -3102,7 +3098,7 @@
 </file>
 
 <file path=ppt/slides/slide1.xml><?xml version="1.0" encoding="utf-8"?>
-<p:sld xmlns:a="http://schemas.openxmlformats.org/drawingml/2006/main" xmlns:p="http://schemas.openxmlformats.org/presentationml/2006/main" xmlns:r="http://schemas.openxmlformats.org/officeDocument/2006/relationships">
+<p:sld xmlns:a="http://schemas.openxmlformats.org/drawingml/2006/main" xmlns:r="http://schemas.openxmlformats.org/officeDocument/2006/relationships" xmlns:p="http://schemas.openxmlformats.org/presentationml/2006/main">
   <p:cSld>
     <p:spTree>
       <p:nvGrpSpPr>
@@ -3110,7 +3106,14 @@
         <p:cNvGrpSpPr/>
         <p:nvPr/>
       </p:nvGrpSpPr>
-      <p:grpSpPr/>
+      <p:grpSpPr>
+        <a:xfrm>
+          <a:off x="0" y="0"/>
+          <a:ext cx="0" cy="0"/>
+          <a:chOff x="0" y="0"/>
+          <a:chExt cx="0" cy="0"/>
+        </a:xfrm>
+      </p:grpSpPr>
       <p:sp>
         <p:nvSpPr>
           <p:cNvPr id="2" name="TextBox 1"/>
@@ -3211,7 +3214,9 @@
             <a:spAutoFit/>
           </a:bodyPr>
           <a:lstStyle/>
-          <a:p/>
+          <a:p>
+            <a:endParaRPr/>
+          </a:p>
           <a:p>
             <a:pPr algn="ctr">
               <a:defRPr sz="2000">
@@ -3275,7 +3280,7 @@
 </file>
 
 <file path=ppt/slides/slide10.xml><?xml version="1.0" encoding="utf-8"?>
-<p:sld xmlns:a="http://schemas.openxmlformats.org/drawingml/2006/main" xmlns:p="http://schemas.openxmlformats.org/presentationml/2006/main" xmlns:r="http://schemas.openxmlformats.org/officeDocument/2006/relationships">
+<p:sld xmlns:a="http://schemas.openxmlformats.org/drawingml/2006/main" xmlns:r="http://schemas.openxmlformats.org/officeDocument/2006/relationships" xmlns:p="http://schemas.openxmlformats.org/presentationml/2006/main">
   <p:cSld>
     <p:spTree>
       <p:nvGrpSpPr>
@@ -3283,7 +3288,14 @@
         <p:cNvGrpSpPr/>
         <p:nvPr/>
       </p:nvGrpSpPr>
-      <p:grpSpPr/>
+      <p:grpSpPr>
+        <a:xfrm>
+          <a:off x="0" y="0"/>
+          <a:ext cx="0" cy="0"/>
+          <a:chOff x="0" y="0"/>
+          <a:chExt cx="0" cy="0"/>
+        </a:xfrm>
+      </p:grpSpPr>
       <p:sp>
         <p:nvSpPr>
           <p:cNvPr id="2" name="TextBox 1"/>
@@ -3437,7 +3449,7 @@
 </file>
 
 <file path=ppt/slides/slide11.xml><?xml version="1.0" encoding="utf-8"?>
-<p:sld xmlns:a="http://schemas.openxmlformats.org/drawingml/2006/main" xmlns:p="http://schemas.openxmlformats.org/presentationml/2006/main" xmlns:r="http://schemas.openxmlformats.org/officeDocument/2006/relationships">
+<p:sld xmlns:a="http://schemas.openxmlformats.org/drawingml/2006/main" xmlns:r="http://schemas.openxmlformats.org/officeDocument/2006/relationships" xmlns:p="http://schemas.openxmlformats.org/presentationml/2006/main">
   <p:cSld>
     <p:spTree>
       <p:nvGrpSpPr>
@@ -3445,7 +3457,14 @@
         <p:cNvGrpSpPr/>
         <p:nvPr/>
       </p:nvGrpSpPr>
-      <p:grpSpPr/>
+      <p:grpSpPr>
+        <a:xfrm>
+          <a:off x="0" y="0"/>
+          <a:ext cx="0" cy="0"/>
+          <a:chOff x="0" y="0"/>
+          <a:chExt cx="0" cy="0"/>
+        </a:xfrm>
+      </p:grpSpPr>
       <p:sp>
         <p:nvSpPr>
           <p:cNvPr id="2" name="TextBox 1"/>
@@ -3599,7 +3618,7 @@
 </file>
 
 <file path=ppt/slides/slide12.xml><?xml version="1.0" encoding="utf-8"?>
-<p:sld xmlns:a="http://schemas.openxmlformats.org/drawingml/2006/main" xmlns:p="http://schemas.openxmlformats.org/presentationml/2006/main" xmlns:r="http://schemas.openxmlformats.org/officeDocument/2006/relationships">
+<p:sld xmlns:a="http://schemas.openxmlformats.org/drawingml/2006/main" xmlns:r="http://schemas.openxmlformats.org/officeDocument/2006/relationships" xmlns:p="http://schemas.openxmlformats.org/presentationml/2006/main">
   <p:cSld>
     <p:spTree>
       <p:nvGrpSpPr>
@@ -3607,7 +3626,14 @@
         <p:cNvGrpSpPr/>
         <p:nvPr/>
       </p:nvGrpSpPr>
-      <p:grpSpPr/>
+      <p:grpSpPr>
+        <a:xfrm>
+          <a:off x="0" y="0"/>
+          <a:ext cx="0" cy="0"/>
+          <a:chOff x="0" y="0"/>
+          <a:chExt cx="0" cy="0"/>
+        </a:xfrm>
+      </p:grpSpPr>
       <p:sp>
         <p:nvSpPr>
           <p:cNvPr id="2" name="TextBox 1"/>
@@ -3761,7 +3787,7 @@
 </file>
 
 <file path=ppt/slides/slide13.xml><?xml version="1.0" encoding="utf-8"?>
-<p:sld xmlns:a="http://schemas.openxmlformats.org/drawingml/2006/main" xmlns:p="http://schemas.openxmlformats.org/presentationml/2006/main" xmlns:r="http://schemas.openxmlformats.org/officeDocument/2006/relationships">
+<p:sld xmlns:a="http://schemas.openxmlformats.org/drawingml/2006/main" xmlns:r="http://schemas.openxmlformats.org/officeDocument/2006/relationships" xmlns:p="http://schemas.openxmlformats.org/presentationml/2006/main">
   <p:cSld>
     <p:spTree>
       <p:nvGrpSpPr>
@@ -3769,7 +3795,14 @@
         <p:cNvGrpSpPr/>
         <p:nvPr/>
       </p:nvGrpSpPr>
-      <p:grpSpPr/>
+      <p:grpSpPr>
+        <a:xfrm>
+          <a:off x="0" y="0"/>
+          <a:ext cx="0" cy="0"/>
+          <a:chOff x="0" y="0"/>
+          <a:chExt cx="0" cy="0"/>
+        </a:xfrm>
+      </p:grpSpPr>
       <p:sp>
         <p:nvSpPr>
           <p:cNvPr id="2" name="TextBox 1"/>
@@ -3947,7 +3980,7 @@
 </file>
 
 <file path=ppt/slides/slide14.xml><?xml version="1.0" encoding="utf-8"?>
-<p:sld xmlns:a="http://schemas.openxmlformats.org/drawingml/2006/main" xmlns:p="http://schemas.openxmlformats.org/presentationml/2006/main" xmlns:r="http://schemas.openxmlformats.org/officeDocument/2006/relationships">
+<p:sld xmlns:a="http://schemas.openxmlformats.org/drawingml/2006/main" xmlns:r="http://schemas.openxmlformats.org/officeDocument/2006/relationships" xmlns:p="http://schemas.openxmlformats.org/presentationml/2006/main">
   <p:cSld>
     <p:spTree>
       <p:nvGrpSpPr>
@@ -3955,7 +3988,14 @@
         <p:cNvGrpSpPr/>
         <p:nvPr/>
       </p:nvGrpSpPr>
-      <p:grpSpPr/>
+      <p:grpSpPr>
+        <a:xfrm>
+          <a:off x="0" y="0"/>
+          <a:ext cx="0" cy="0"/>
+          <a:chOff x="0" y="0"/>
+          <a:chExt cx="0" cy="0"/>
+        </a:xfrm>
+      </p:grpSpPr>
       <p:sp>
         <p:nvSpPr>
           <p:cNvPr id="2" name="TextBox 1"/>
@@ -4146,7 +4186,7 @@
 </file>
 
 <file path=ppt/slides/slide15.xml><?xml version="1.0" encoding="utf-8"?>
-<p:sld xmlns:a="http://schemas.openxmlformats.org/drawingml/2006/main" xmlns:p="http://schemas.openxmlformats.org/presentationml/2006/main" xmlns:r="http://schemas.openxmlformats.org/officeDocument/2006/relationships">
+<p:sld xmlns:a="http://schemas.openxmlformats.org/drawingml/2006/main" xmlns:r="http://schemas.openxmlformats.org/officeDocument/2006/relationships" xmlns:p="http://schemas.openxmlformats.org/presentationml/2006/main">
   <p:cSld>
     <p:spTree>
       <p:nvGrpSpPr>
@@ -4154,7 +4194,14 @@
         <p:cNvGrpSpPr/>
         <p:nvPr/>
       </p:nvGrpSpPr>
-      <p:grpSpPr/>
+      <p:grpSpPr>
+        <a:xfrm>
+          <a:off x="0" y="0"/>
+          <a:ext cx="0" cy="0"/>
+          <a:chOff x="0" y="0"/>
+          <a:chExt cx="0" cy="0"/>
+        </a:xfrm>
+      </p:grpSpPr>
       <p:sp>
         <p:nvSpPr>
           <p:cNvPr id="2" name="TextBox 1"/>
@@ -4233,7 +4280,7 @@
         <p:spPr>
           <a:xfrm>
             <a:off x="731520" y="1371600"/>
-            <a:ext cx="10698480" cy="5029200"/>
+            <a:ext cx="10698480" cy="1415772"/>
           </a:xfrm>
           <a:prstGeom prst="rect">
             <a:avLst/>
@@ -4246,41 +4293,58 @@
           </a:bodyPr>
           <a:lstStyle/>
           <a:p>
-            <a:pPr>
-              <a:spcAft>
-                <a:spcPts val="1200"/>
-              </a:spcAft>
+            <a:pPr marL="342900" indent="-342900">
+              <a:spcAft>
+                <a:spcPts val="1200"/>
+              </a:spcAft>
+              <a:buFont typeface="Arial" panose="020B0604020202020204" pitchFamily="34" charset="0"/>
+              <a:buChar char="•"/>
               <a:defRPr sz="2200">
                 <a:latin typeface="Times New Roman"/>
               </a:defRPr>
             </a:pPr>
             <a:r>
+              <a:rPr dirty="0"/>
               <a:t>Command Line Power: Search from your terminal.</a:t>
             </a:r>
           </a:p>
           <a:p>
-            <a:pPr>
-              <a:spcAft>
-                <a:spcPts val="1200"/>
-              </a:spcAft>
+            <a:pPr marL="342900" indent="-342900">
+              <a:spcAft>
+                <a:spcPts val="1200"/>
+              </a:spcAft>
+              <a:buFont typeface="Arial" panose="020B0604020202020204" pitchFamily="34" charset="0"/>
+              <a:buChar char="•"/>
               <a:defRPr sz="2200">
                 <a:latin typeface="Times New Roman"/>
               </a:defRPr>
             </a:pPr>
             <a:r>
-              <a:t>Usage: python -m searchlens.cli search --query 'bm25' --method bm25</a:t>
-            </a:r>
-          </a:p>
-          <a:p>
-            <a:pPr>
-              <a:spcAft>
-                <a:spcPts val="1200"/>
-              </a:spcAft>
+              <a:rPr dirty="0"/>
+              <a:t>Usage: python -m </a:t>
+            </a:r>
+            <a:r>
+              <a:rPr dirty="0" err="1"/>
+              <a:t>searchlens.cli</a:t>
+            </a:r>
+            <a:r>
+              <a:rPr dirty="0"/>
+              <a:t> search --query 'bm25' --method bm25</a:t>
+            </a:r>
+          </a:p>
+          <a:p>
+            <a:pPr marL="342900" indent="-342900">
+              <a:spcAft>
+                <a:spcPts val="1200"/>
+              </a:spcAft>
+              <a:buFont typeface="Arial" panose="020B0604020202020204" pitchFamily="34" charset="0"/>
+              <a:buChar char="•"/>
               <a:defRPr sz="2200">
                 <a:latin typeface="Times New Roman"/>
               </a:defRPr>
             </a:pPr>
             <a:r>
+              <a:rPr dirty="0"/>
               <a:t>Returns: Ranked list, scores, and snippets with term highlighting.</a:t>
             </a:r>
           </a:p>
@@ -4295,7 +4359,7 @@
 </file>
 
 <file path=ppt/slides/slide16.xml><?xml version="1.0" encoding="utf-8"?>
-<p:sld xmlns:a="http://schemas.openxmlformats.org/drawingml/2006/main" xmlns:p="http://schemas.openxmlformats.org/presentationml/2006/main" xmlns:r="http://schemas.openxmlformats.org/officeDocument/2006/relationships">
+<p:sld xmlns:a="http://schemas.openxmlformats.org/drawingml/2006/main" xmlns:r="http://schemas.openxmlformats.org/officeDocument/2006/relationships" xmlns:p="http://schemas.openxmlformats.org/presentationml/2006/main">
   <p:cSld>
     <p:spTree>
       <p:nvGrpSpPr>
@@ -4303,7 +4367,14 @@
         <p:cNvGrpSpPr/>
         <p:nvPr/>
       </p:nvGrpSpPr>
-      <p:grpSpPr/>
+      <p:grpSpPr>
+        <a:xfrm>
+          <a:off x="0" y="0"/>
+          <a:ext cx="0" cy="0"/>
+          <a:chOff x="0" y="0"/>
+          <a:chExt cx="0" cy="0"/>
+        </a:xfrm>
+      </p:grpSpPr>
       <p:sp>
         <p:nvSpPr>
           <p:cNvPr id="2" name="TextBox 1"/>
@@ -4382,7 +4453,7 @@
         <p:spPr>
           <a:xfrm>
             <a:off x="731520" y="1371600"/>
-            <a:ext cx="10698480" cy="5029200"/>
+            <a:ext cx="10698480" cy="1415772"/>
           </a:xfrm>
           <a:prstGeom prst="rect">
             <a:avLst/>
@@ -4395,41 +4466,50 @@
           </a:bodyPr>
           <a:lstStyle/>
           <a:p>
-            <a:pPr>
-              <a:spcAft>
-                <a:spcPts val="1200"/>
-              </a:spcAft>
+            <a:pPr marL="342900" indent="-342900">
+              <a:spcAft>
+                <a:spcPts val="1200"/>
+              </a:spcAft>
+              <a:buFont typeface="Arial" panose="020B0604020202020204" pitchFamily="34" charset="0"/>
+              <a:buChar char="•"/>
               <a:defRPr sz="2200">
                 <a:latin typeface="Times New Roman"/>
               </a:defRPr>
             </a:pPr>
             <a:r>
+              <a:rPr dirty="0"/>
               <a:t>A fully functional search engine portal built using Python's native http library.</a:t>
             </a:r>
           </a:p>
           <a:p>
-            <a:pPr>
-              <a:spcAft>
-                <a:spcPts val="1200"/>
-              </a:spcAft>
+            <a:pPr marL="342900" indent="-342900">
+              <a:spcAft>
+                <a:spcPts val="1200"/>
+              </a:spcAft>
+              <a:buFont typeface="Arial" panose="020B0604020202020204" pitchFamily="34" charset="0"/>
+              <a:buChar char="•"/>
               <a:defRPr sz="2200">
                 <a:latin typeface="Times New Roman"/>
               </a:defRPr>
             </a:pPr>
             <a:r>
+              <a:rPr dirty="0"/>
               <a:t>No external dependencies (Flask/Django) required for the engine logic.</a:t>
             </a:r>
           </a:p>
           <a:p>
-            <a:pPr>
-              <a:spcAft>
-                <a:spcPts val="1200"/>
-              </a:spcAft>
+            <a:pPr marL="342900" indent="-342900">
+              <a:spcAft>
+                <a:spcPts val="1200"/>
+              </a:spcAft>
+              <a:buFont typeface="Arial" panose="020B0604020202020204" pitchFamily="34" charset="0"/>
+              <a:buChar char="•"/>
               <a:defRPr sz="2200">
                 <a:latin typeface="Times New Roman"/>
               </a:defRPr>
             </a:pPr>
             <a:r>
+              <a:rPr dirty="0"/>
               <a:t>Live interactivity: Toggle BM25, TF-IDF, or Boolean with a single click.</a:t>
             </a:r>
           </a:p>
@@ -4444,7 +4524,7 @@
 </file>
 
 <file path=ppt/slides/slide17.xml><?xml version="1.0" encoding="utf-8"?>
-<p:sld xmlns:a="http://schemas.openxmlformats.org/drawingml/2006/main" xmlns:p="http://schemas.openxmlformats.org/presentationml/2006/main" xmlns:r="http://schemas.openxmlformats.org/officeDocument/2006/relationships">
+<p:sld xmlns:a="http://schemas.openxmlformats.org/drawingml/2006/main" xmlns:r="http://schemas.openxmlformats.org/officeDocument/2006/relationships" xmlns:p="http://schemas.openxmlformats.org/presentationml/2006/main">
   <p:cSld>
     <p:spTree>
       <p:nvGrpSpPr>
@@ -4452,7 +4532,14 @@
         <p:cNvGrpSpPr/>
         <p:nvPr/>
       </p:nvGrpSpPr>
-      <p:grpSpPr/>
+      <p:grpSpPr>
+        <a:xfrm>
+          <a:off x="0" y="0"/>
+          <a:ext cx="0" cy="0"/>
+          <a:chOff x="0" y="0"/>
+          <a:chExt cx="0" cy="0"/>
+        </a:xfrm>
+      </p:grpSpPr>
       <p:sp>
         <p:nvSpPr>
           <p:cNvPr id="2" name="TextBox 1"/>
@@ -4531,7 +4618,7 @@
         <p:spPr>
           <a:xfrm>
             <a:off x="731520" y="1371600"/>
-            <a:ext cx="10698480" cy="5029200"/>
+            <a:ext cx="10698480" cy="1908215"/>
           </a:xfrm>
           <a:prstGeom prst="rect">
             <a:avLst/>
@@ -4544,54 +4631,66 @@
           </a:bodyPr>
           <a:lstStyle/>
           <a:p>
-            <a:pPr>
-              <a:spcAft>
-                <a:spcPts val="1200"/>
-              </a:spcAft>
+            <a:pPr marL="342900" indent="-342900">
+              <a:spcAft>
+                <a:spcPts val="1200"/>
+              </a:spcAft>
+              <a:buFont typeface="Arial" panose="020B0604020202020204" pitchFamily="34" charset="0"/>
+              <a:buChar char="•"/>
               <a:defRPr sz="2200">
                 <a:latin typeface="Times New Roman"/>
               </a:defRPr>
             </a:pPr>
             <a:r>
+              <a:rPr dirty="0"/>
               <a:t>Dataset: SETC-60 (Synthetic Search Engine Tech Collection).</a:t>
             </a:r>
           </a:p>
           <a:p>
-            <a:pPr>
-              <a:spcAft>
-                <a:spcPts val="1200"/>
-              </a:spcAft>
+            <a:pPr marL="342900" indent="-342900">
+              <a:spcAft>
+                <a:spcPts val="1200"/>
+              </a:spcAft>
+              <a:buFont typeface="Arial" panose="020B0604020202020204" pitchFamily="34" charset="0"/>
+              <a:buChar char="•"/>
               <a:defRPr sz="2200">
                 <a:latin typeface="Times New Roman"/>
               </a:defRPr>
             </a:pPr>
             <a:r>
+              <a:rPr dirty="0"/>
               <a:t>Corpus: 60 technical documents covering 12 topics (Indexing, PageRank, etc.).</a:t>
             </a:r>
           </a:p>
           <a:p>
-            <a:pPr>
-              <a:spcAft>
-                <a:spcPts val="1200"/>
-              </a:spcAft>
+            <a:pPr marL="342900" indent="-342900">
+              <a:spcAft>
+                <a:spcPts val="1200"/>
+              </a:spcAft>
+              <a:buFont typeface="Arial" panose="020B0604020202020204" pitchFamily="34" charset="0"/>
+              <a:buChar char="•"/>
               <a:defRPr sz="2200">
                 <a:latin typeface="Times New Roman"/>
               </a:defRPr>
             </a:pPr>
             <a:r>
+              <a:rPr dirty="0"/>
               <a:t>Queries: 12 standardized user-style queries.</a:t>
             </a:r>
           </a:p>
           <a:p>
-            <a:pPr>
-              <a:spcAft>
-                <a:spcPts val="1200"/>
-              </a:spcAft>
+            <a:pPr marL="342900" indent="-342900">
+              <a:spcAft>
+                <a:spcPts val="1200"/>
+              </a:spcAft>
+              <a:buFont typeface="Arial" panose="020B0604020202020204" pitchFamily="34" charset="0"/>
+              <a:buChar char="•"/>
               <a:defRPr sz="2200">
                 <a:latin typeface="Times New Roman"/>
               </a:defRPr>
             </a:pPr>
             <a:r>
+              <a:rPr dirty="0"/>
               <a:t>Ground Truth: 75 graded relevance judgments for precise measurement.</a:t>
             </a:r>
           </a:p>
@@ -4606,7 +4705,7 @@
 </file>
 
 <file path=ppt/slides/slide18.xml><?xml version="1.0" encoding="utf-8"?>
-<p:sld xmlns:a="http://schemas.openxmlformats.org/drawingml/2006/main" xmlns:p="http://schemas.openxmlformats.org/presentationml/2006/main" xmlns:r="http://schemas.openxmlformats.org/officeDocument/2006/relationships">
+<p:sld xmlns:a="http://schemas.openxmlformats.org/drawingml/2006/main" xmlns:r="http://schemas.openxmlformats.org/officeDocument/2006/relationships" xmlns:p="http://schemas.openxmlformats.org/presentationml/2006/main">
   <p:cSld>
     <p:spTree>
       <p:nvGrpSpPr>
@@ -4614,7 +4713,14 @@
         <p:cNvGrpSpPr/>
         <p:nvPr/>
       </p:nvGrpSpPr>
-      <p:grpSpPr/>
+      <p:grpSpPr>
+        <a:xfrm>
+          <a:off x="0" y="0"/>
+          <a:ext cx="0" cy="0"/>
+          <a:chOff x="0" y="0"/>
+          <a:chExt cx="0" cy="0"/>
+        </a:xfrm>
+      </p:grpSpPr>
       <p:sp>
         <p:nvSpPr>
           <p:cNvPr id="2" name="TextBox 1"/>
@@ -4693,7 +4799,7 @@
         <p:spPr>
           <a:xfrm>
             <a:off x="731520" y="1371600"/>
-            <a:ext cx="10698480" cy="5029200"/>
+            <a:ext cx="10698480" cy="2246769"/>
           </a:xfrm>
           <a:prstGeom prst="rect">
             <a:avLst/>
@@ -4706,55 +4812,71 @@
           </a:bodyPr>
           <a:lstStyle/>
           <a:p>
-            <a:pPr>
-              <a:spcAft>
-                <a:spcPts val="1200"/>
-              </a:spcAft>
+            <a:pPr marL="342900" indent="-342900">
+              <a:spcAft>
+                <a:spcPts val="1200"/>
+              </a:spcAft>
+              <a:buFont typeface="Arial" panose="020B0604020202020204" pitchFamily="34" charset="0"/>
+              <a:buChar char="•"/>
               <a:defRPr sz="2200">
                 <a:latin typeface="Times New Roman"/>
               </a:defRPr>
             </a:pPr>
             <a:r>
+              <a:rPr dirty="0"/>
               <a:t>P@5 (Precision at 5): Are the top 5 results relevant?</a:t>
             </a:r>
           </a:p>
           <a:p>
-            <a:pPr>
-              <a:spcAft>
-                <a:spcPts val="1200"/>
-              </a:spcAft>
+            <a:pPr marL="342900" indent="-342900">
+              <a:spcAft>
+                <a:spcPts val="1200"/>
+              </a:spcAft>
+              <a:buFont typeface="Arial" panose="020B0604020202020204" pitchFamily="34" charset="0"/>
+              <a:buChar char="•"/>
               <a:defRPr sz="2200">
                 <a:latin typeface="Times New Roman"/>
               </a:defRPr>
             </a:pPr>
             <a:r>
+              <a:rPr dirty="0"/>
               <a:t>Recall@10: Did we find most of the relevant documents?</a:t>
             </a:r>
           </a:p>
           <a:p>
-            <a:pPr>
-              <a:spcAft>
-                <a:spcPts val="1200"/>
-              </a:spcAft>
+            <a:pPr marL="342900" indent="-342900">
+              <a:spcAft>
+                <a:spcPts val="1200"/>
+              </a:spcAft>
+              <a:buFont typeface="Arial" panose="020B0604020202020204" pitchFamily="34" charset="0"/>
+              <a:buChar char="•"/>
               <a:defRPr sz="2200">
                 <a:latin typeface="Times New Roman"/>
               </a:defRPr>
             </a:pPr>
             <a:r>
+              <a:rPr dirty="0"/>
               <a:t>MAP (Mean Average Precision): The gold standard for overall ranking quality.</a:t>
             </a:r>
           </a:p>
           <a:p>
-            <a:pPr>
-              <a:spcAft>
-                <a:spcPts val="1200"/>
-              </a:spcAft>
+            <a:pPr marL="342900" indent="-342900">
+              <a:spcAft>
+                <a:spcPts val="1200"/>
+              </a:spcAft>
+              <a:buFont typeface="Arial" panose="020B0604020202020204" pitchFamily="34" charset="0"/>
+              <a:buChar char="•"/>
               <a:defRPr sz="2200">
                 <a:latin typeface="Times New Roman"/>
               </a:defRPr>
             </a:pPr>
             <a:r>
-              <a:t>nDCG (Normalized Discounted Cumulative Gain): Measures how well the best docs were 'pushed' to the very top.</a:t>
+              <a:rPr dirty="0" err="1"/>
+              <a:t>nDCG</a:t>
+            </a:r>
+            <a:r>
+              <a:rPr dirty="0"/>
+              <a:t> (Normalized Discounted Cumulative Gain): Measures how well the best docs were 'pushed' to the very top.</a:t>
             </a:r>
           </a:p>
         </p:txBody>
@@ -4768,7 +4890,7 @@
 </file>
 
 <file path=ppt/slides/slide19.xml><?xml version="1.0" encoding="utf-8"?>
-<p:sld xmlns:a="http://schemas.openxmlformats.org/drawingml/2006/main" xmlns:p="http://schemas.openxmlformats.org/presentationml/2006/main" xmlns:r="http://schemas.openxmlformats.org/officeDocument/2006/relationships">
+<p:sld xmlns:a="http://schemas.openxmlformats.org/drawingml/2006/main" xmlns:r="http://schemas.openxmlformats.org/officeDocument/2006/relationships" xmlns:p="http://schemas.openxmlformats.org/presentationml/2006/main">
   <p:cSld>
     <p:spTree>
       <p:nvGrpSpPr>
@@ -4776,7 +4898,14 @@
         <p:cNvGrpSpPr/>
         <p:nvPr/>
       </p:nvGrpSpPr>
-      <p:grpSpPr/>
+      <p:grpSpPr>
+        <a:xfrm>
+          <a:off x="0" y="0"/>
+          <a:ext cx="0" cy="0"/>
+          <a:chOff x="0" y="0"/>
+          <a:chExt cx="0" cy="0"/>
+        </a:xfrm>
+      </p:grpSpPr>
       <p:sp>
         <p:nvSpPr>
           <p:cNvPr id="2" name="TextBox 1"/>
@@ -4865,12 +4994,48 @@
                 <a:tableStyleId>{5C22544A-7EE6-4342-B048-85BDC9FD1C3A}</a:tableStyleId>
               </a:tblPr>
               <a:tblGrid>
-                <a:gridCol w="1783080"/>
-                <a:gridCol w="1783080"/>
-                <a:gridCol w="1783080"/>
-                <a:gridCol w="1783080"/>
-                <a:gridCol w="1783080"/>
-                <a:gridCol w="1783080"/>
+                <a:gridCol w="1783080">
+                  <a:extLst>
+                    <a:ext uri="{9D8B030D-6E8A-4147-A177-3AD203B41FA5}">
+                      <a16:colId xmlns:a16="http://schemas.microsoft.com/office/drawing/2014/main" val="20000"/>
+                    </a:ext>
+                  </a:extLst>
+                </a:gridCol>
+                <a:gridCol w="1783080">
+                  <a:extLst>
+                    <a:ext uri="{9D8B030D-6E8A-4147-A177-3AD203B41FA5}">
+                      <a16:colId xmlns:a16="http://schemas.microsoft.com/office/drawing/2014/main" val="20001"/>
+                    </a:ext>
+                  </a:extLst>
+                </a:gridCol>
+                <a:gridCol w="1783080">
+                  <a:extLst>
+                    <a:ext uri="{9D8B030D-6E8A-4147-A177-3AD203B41FA5}">
+                      <a16:colId xmlns:a16="http://schemas.microsoft.com/office/drawing/2014/main" val="20002"/>
+                    </a:ext>
+                  </a:extLst>
+                </a:gridCol>
+                <a:gridCol w="1783080">
+                  <a:extLst>
+                    <a:ext uri="{9D8B030D-6E8A-4147-A177-3AD203B41FA5}">
+                      <a16:colId xmlns:a16="http://schemas.microsoft.com/office/drawing/2014/main" val="20003"/>
+                    </a:ext>
+                  </a:extLst>
+                </a:gridCol>
+                <a:gridCol w="1783080">
+                  <a:extLst>
+                    <a:ext uri="{9D8B030D-6E8A-4147-A177-3AD203B41FA5}">
+                      <a16:colId xmlns:a16="http://schemas.microsoft.com/office/drawing/2014/main" val="20004"/>
+                    </a:ext>
+                  </a:extLst>
+                </a:gridCol>
+                <a:gridCol w="1783080">
+                  <a:extLst>
+                    <a:ext uri="{9D8B030D-6E8A-4147-A177-3AD203B41FA5}">
+                      <a16:colId xmlns:a16="http://schemas.microsoft.com/office/drawing/2014/main" val="20005"/>
+                    </a:ext>
+                  </a:extLst>
+                </a:gridCol>
               </a:tblGrid>
               <a:tr h="640080">
                 <a:tc>
@@ -4879,7 +5044,7 @@
                     <a:lstStyle/>
                     <a:p>
                       <a:pPr>
-                        <a:defRPr b="1" sz="1600"/>
+                        <a:defRPr sz="1600" b="1"/>
                       </a:pPr>
                       <a:r>
                         <a:t>Method</a:t>
@@ -4894,7 +5059,7 @@
                     <a:lstStyle/>
                     <a:p>
                       <a:pPr>
-                        <a:defRPr b="1" sz="1600"/>
+                        <a:defRPr sz="1600" b="1"/>
                       </a:pPr>
                       <a:r>
                         <a:t>P@5</a:t>
@@ -4909,7 +5074,7 @@
                     <a:lstStyle/>
                     <a:p>
                       <a:pPr>
-                        <a:defRPr b="1" sz="1600"/>
+                        <a:defRPr sz="1600" b="1"/>
                       </a:pPr>
                       <a:r>
                         <a:t>Recall@10</a:t>
@@ -4924,7 +5089,7 @@
                     <a:lstStyle/>
                     <a:p>
                       <a:pPr>
-                        <a:defRPr b="1" sz="1600"/>
+                        <a:defRPr sz="1600" b="1"/>
                       </a:pPr>
                       <a:r>
                         <a:t>MAP</a:t>
@@ -4939,7 +5104,7 @@
                     <a:lstStyle/>
                     <a:p>
                       <a:pPr>
-                        <a:defRPr b="1" sz="1600"/>
+                        <a:defRPr sz="1600" b="1"/>
                       </a:pPr>
                       <a:r>
                         <a:t>MRR</a:t>
@@ -4954,7 +5119,7 @@
                     <a:lstStyle/>
                     <a:p>
                       <a:pPr>
-                        <a:defRPr b="1" sz="1600"/>
+                        <a:defRPr sz="1600" b="1"/>
                       </a:pPr>
                       <a:r>
                         <a:t>nDCG@10</a:t>
@@ -4963,6 +5128,11 @@
                   </a:txBody>
                   <a:tcPr/>
                 </a:tc>
+                <a:extLst>
+                  <a:ext uri="{0D108BD9-81ED-4DB2-BD59-A6C34878D82A}">
+                    <a16:rowId xmlns:a16="http://schemas.microsoft.com/office/drawing/2014/main" val="10000"/>
+                  </a:ext>
+                </a:extLst>
               </a:tr>
               <a:tr h="640080">
                 <a:tc>
@@ -5055,6 +5225,11 @@
                   </a:txBody>
                   <a:tcPr/>
                 </a:tc>
+                <a:extLst>
+                  <a:ext uri="{0D108BD9-81ED-4DB2-BD59-A6C34878D82A}">
+                    <a16:rowId xmlns:a16="http://schemas.microsoft.com/office/drawing/2014/main" val="10001"/>
+                  </a:ext>
+                </a:extLst>
               </a:tr>
               <a:tr h="640080">
                 <a:tc>
@@ -5147,6 +5322,11 @@
                   </a:txBody>
                   <a:tcPr/>
                 </a:tc>
+                <a:extLst>
+                  <a:ext uri="{0D108BD9-81ED-4DB2-BD59-A6C34878D82A}">
+                    <a16:rowId xmlns:a16="http://schemas.microsoft.com/office/drawing/2014/main" val="10002"/>
+                  </a:ext>
+                </a:extLst>
               </a:tr>
               <a:tr h="640080">
                 <a:tc>
@@ -5239,6 +5419,11 @@
                   </a:txBody>
                   <a:tcPr/>
                 </a:tc>
+                <a:extLst>
+                  <a:ext uri="{0D108BD9-81ED-4DB2-BD59-A6C34878D82A}">
+                    <a16:rowId xmlns:a16="http://schemas.microsoft.com/office/drawing/2014/main" val="10003"/>
+                  </a:ext>
+                </a:extLst>
               </a:tr>
               <a:tr h="640080">
                 <a:tc>
@@ -5331,6 +5516,11 @@
                   </a:txBody>
                   <a:tcPr/>
                 </a:tc>
+                <a:extLst>
+                  <a:ext uri="{0D108BD9-81ED-4DB2-BD59-A6C34878D82A}">
+                    <a16:rowId xmlns:a16="http://schemas.microsoft.com/office/drawing/2014/main" val="10004"/>
+                  </a:ext>
+                </a:extLst>
               </a:tr>
             </a:tbl>
           </a:graphicData>
@@ -5345,7 +5535,7 @@
 </file>
 
 <file path=ppt/slides/slide2.xml><?xml version="1.0" encoding="utf-8"?>
-<p:sld xmlns:a="http://schemas.openxmlformats.org/drawingml/2006/main" xmlns:p="http://schemas.openxmlformats.org/presentationml/2006/main" xmlns:r="http://schemas.openxmlformats.org/officeDocument/2006/relationships">
+<p:sld xmlns:a="http://schemas.openxmlformats.org/drawingml/2006/main" xmlns:r="http://schemas.openxmlformats.org/officeDocument/2006/relationships" xmlns:p="http://schemas.openxmlformats.org/presentationml/2006/main">
   <p:cSld>
     <p:spTree>
       <p:nvGrpSpPr>
@@ -5353,7 +5543,14 @@
         <p:cNvGrpSpPr/>
         <p:nvPr/>
       </p:nvGrpSpPr>
-      <p:grpSpPr/>
+      <p:grpSpPr>
+        <a:xfrm>
+          <a:off x="0" y="0"/>
+          <a:ext cx="0" cy="0"/>
+          <a:chOff x="0" y="0"/>
+          <a:chExt cx="0" cy="0"/>
+        </a:xfrm>
+      </p:grpSpPr>
       <p:sp>
         <p:nvSpPr>
           <p:cNvPr id="2" name="TextBox 1"/>
@@ -5520,7 +5717,7 @@
 </file>
 
 <file path=ppt/slides/slide20.xml><?xml version="1.0" encoding="utf-8"?>
-<p:sld xmlns:a="http://schemas.openxmlformats.org/drawingml/2006/main" xmlns:p="http://schemas.openxmlformats.org/presentationml/2006/main" xmlns:r="http://schemas.openxmlformats.org/officeDocument/2006/relationships">
+<p:sld xmlns:a="http://schemas.openxmlformats.org/drawingml/2006/main" xmlns:r="http://schemas.openxmlformats.org/officeDocument/2006/relationships" xmlns:p="http://schemas.openxmlformats.org/presentationml/2006/main">
   <p:cSld>
     <p:spTree>
       <p:nvGrpSpPr>
@@ -5528,7 +5725,14 @@
         <p:cNvGrpSpPr/>
         <p:nvPr/>
       </p:nvGrpSpPr>
-      <p:grpSpPr/>
+      <p:grpSpPr>
+        <a:xfrm>
+          <a:off x="0" y="0"/>
+          <a:ext cx="0" cy="0"/>
+          <a:chOff x="0" y="0"/>
+          <a:chExt cx="0" cy="0"/>
+        </a:xfrm>
+      </p:grpSpPr>
       <p:sp>
         <p:nvSpPr>
           <p:cNvPr id="2" name="TextBox 1"/>
@@ -5607,7 +5811,7 @@
         <p:spPr>
           <a:xfrm>
             <a:off x="731520" y="1371600"/>
-            <a:ext cx="10698480" cy="5029200"/>
+            <a:ext cx="10698480" cy="1908215"/>
           </a:xfrm>
           <a:prstGeom prst="rect">
             <a:avLst/>
@@ -5620,54 +5824,66 @@
           </a:bodyPr>
           <a:lstStyle/>
           <a:p>
-            <a:pPr>
-              <a:spcAft>
-                <a:spcPts val="1200"/>
-              </a:spcAft>
+            <a:pPr marL="342900" indent="-342900">
+              <a:spcAft>
+                <a:spcPts val="1200"/>
+              </a:spcAft>
+              <a:buFont typeface="Arial" panose="020B0604020202020204" pitchFamily="34" charset="0"/>
+              <a:buChar char="•"/>
               <a:defRPr sz="2200">
                 <a:latin typeface="Times New Roman"/>
               </a:defRPr>
             </a:pPr>
             <a:r>
+              <a:rPr dirty="0"/>
               <a:t>Observation: BM25 consistently outscored TF-IDF across all metrics.</a:t>
             </a:r>
           </a:p>
           <a:p>
-            <a:pPr>
-              <a:spcAft>
-                <a:spcPts val="1200"/>
-              </a:spcAft>
+            <a:pPr marL="342900" indent="-342900">
+              <a:spcAft>
+                <a:spcPts val="1200"/>
+              </a:spcAft>
+              <a:buFont typeface="Arial" panose="020B0604020202020204" pitchFamily="34" charset="0"/>
+              <a:buChar char="•"/>
               <a:defRPr sz="2200">
                 <a:latin typeface="Times New Roman"/>
               </a:defRPr>
             </a:pPr>
             <a:r>
+              <a:rPr dirty="0"/>
               <a:t>Why? Because the SETC-60 documents are short and technical.</a:t>
             </a:r>
           </a:p>
           <a:p>
-            <a:pPr>
-              <a:spcAft>
-                <a:spcPts val="1200"/>
-              </a:spcAft>
+            <a:pPr marL="342900" indent="-342900">
+              <a:spcAft>
+                <a:spcPts val="1200"/>
+              </a:spcAft>
+              <a:buFont typeface="Arial" panose="020B0604020202020204" pitchFamily="34" charset="0"/>
+              <a:buChar char="•"/>
               <a:defRPr sz="2200">
                 <a:latin typeface="Times New Roman"/>
               </a:defRPr>
             </a:pPr>
             <a:r>
+              <a:rPr dirty="0"/>
               <a:t>BM25's length normalization prevents short documents from being unfairly penalized.</a:t>
             </a:r>
           </a:p>
           <a:p>
-            <a:pPr>
-              <a:spcAft>
-                <a:spcPts val="1200"/>
-              </a:spcAft>
+            <a:pPr marL="342900" indent="-342900">
+              <a:spcAft>
+                <a:spcPts val="1200"/>
+              </a:spcAft>
+              <a:buFont typeface="Arial" panose="020B0604020202020204" pitchFamily="34" charset="0"/>
+              <a:buChar char="•"/>
               <a:defRPr sz="2200">
                 <a:latin typeface="Times New Roman"/>
               </a:defRPr>
             </a:pPr>
             <a:r>
+              <a:rPr dirty="0"/>
               <a:t>TF-IDF remains a strong baseline, but fails to handle term saturation efficiently.</a:t>
             </a:r>
           </a:p>
@@ -5682,7 +5898,7 @@
 </file>
 
 <file path=ppt/slides/slide21.xml><?xml version="1.0" encoding="utf-8"?>
-<p:sld xmlns:a="http://schemas.openxmlformats.org/drawingml/2006/main" xmlns:p="http://schemas.openxmlformats.org/presentationml/2006/main" xmlns:r="http://schemas.openxmlformats.org/officeDocument/2006/relationships">
+<p:sld xmlns:a="http://schemas.openxmlformats.org/drawingml/2006/main" xmlns:r="http://schemas.openxmlformats.org/officeDocument/2006/relationships" xmlns:p="http://schemas.openxmlformats.org/presentationml/2006/main">
   <p:cSld>
     <p:spTree>
       <p:nvGrpSpPr>
@@ -5690,7 +5906,14 @@
         <p:cNvGrpSpPr/>
         <p:nvPr/>
       </p:nvGrpSpPr>
-      <p:grpSpPr/>
+      <p:grpSpPr>
+        <a:xfrm>
+          <a:off x="0" y="0"/>
+          <a:ext cx="0" cy="0"/>
+          <a:chOff x="0" y="0"/>
+          <a:chExt cx="0" cy="0"/>
+        </a:xfrm>
+      </p:grpSpPr>
       <p:sp>
         <p:nvSpPr>
           <p:cNvPr id="2" name="TextBox 1"/>
@@ -5769,7 +5992,7 @@
         <p:spPr>
           <a:xfrm>
             <a:off x="731520" y="1371600"/>
-            <a:ext cx="10698480" cy="5029200"/>
+            <a:ext cx="10698480" cy="2246769"/>
           </a:xfrm>
           <a:prstGeom prst="rect">
             <a:avLst/>
@@ -5782,54 +6005,66 @@
           </a:bodyPr>
           <a:lstStyle/>
           <a:p>
-            <a:pPr>
-              <a:spcAft>
-                <a:spcPts val="1200"/>
-              </a:spcAft>
+            <a:pPr marL="342900" indent="-342900">
+              <a:spcAft>
+                <a:spcPts val="1200"/>
+              </a:spcAft>
+              <a:buFont typeface="Arial" panose="020B0604020202020204" pitchFamily="34" charset="0"/>
+              <a:buChar char="•"/>
               <a:defRPr sz="2200">
                 <a:latin typeface="Times New Roman"/>
               </a:defRPr>
             </a:pPr>
             <a:r>
+              <a:rPr dirty="0"/>
               <a:t>Recall Advantage: BM25+PRF achieved the highest Recall@10 (0.8641).</a:t>
             </a:r>
           </a:p>
           <a:p>
-            <a:pPr>
-              <a:spcAft>
-                <a:spcPts val="1200"/>
-              </a:spcAft>
+            <a:pPr marL="342900" indent="-342900">
+              <a:spcAft>
+                <a:spcPts val="1200"/>
+              </a:spcAft>
+              <a:buFont typeface="Arial" panose="020B0604020202020204" pitchFamily="34" charset="0"/>
+              <a:buChar char="•"/>
               <a:defRPr sz="2200">
                 <a:latin typeface="Times New Roman"/>
               </a:defRPr>
             </a:pPr>
             <a:r>
+              <a:rPr dirty="0"/>
               <a:t>Precision Trade-off: MAP actually decreased slightly (0.82 → 0.81).</a:t>
             </a:r>
           </a:p>
           <a:p>
-            <a:pPr>
-              <a:spcAft>
-                <a:spcPts val="1200"/>
-              </a:spcAft>
+            <a:pPr marL="342900" indent="-342900">
+              <a:spcAft>
+                <a:spcPts val="1200"/>
+              </a:spcAft>
+              <a:buFont typeface="Arial" panose="020B0604020202020204" pitchFamily="34" charset="0"/>
+              <a:buChar char="•"/>
               <a:defRPr sz="2200">
                 <a:latin typeface="Times New Roman"/>
               </a:defRPr>
             </a:pPr>
             <a:r>
+              <a:rPr dirty="0"/>
               <a:t>Topic Drift: When the initial top results contain slightly unrelated technical terms, the query expands in the wrong direction.</a:t>
             </a:r>
           </a:p>
           <a:p>
-            <a:pPr>
-              <a:spcAft>
-                <a:spcPts val="1200"/>
-              </a:spcAft>
+            <a:pPr marL="342900" indent="-342900">
+              <a:spcAft>
+                <a:spcPts val="1200"/>
+              </a:spcAft>
+              <a:buFont typeface="Arial" panose="020B0604020202020204" pitchFamily="34" charset="0"/>
+              <a:buChar char="•"/>
               <a:defRPr sz="2200">
                 <a:latin typeface="Times New Roman"/>
               </a:defRPr>
             </a:pPr>
             <a:r>
+              <a:rPr dirty="0"/>
               <a:t>Conclusion: PRF is powerful but requires careful parameter tuning (k=3 works best).</a:t>
             </a:r>
           </a:p>
@@ -5844,7 +6079,7 @@
 </file>
 
 <file path=ppt/slides/slide22.xml><?xml version="1.0" encoding="utf-8"?>
-<p:sld xmlns:a="http://schemas.openxmlformats.org/drawingml/2006/main" xmlns:p="http://schemas.openxmlformats.org/presentationml/2006/main" xmlns:r="http://schemas.openxmlformats.org/officeDocument/2006/relationships">
+<p:sld xmlns:a="http://schemas.openxmlformats.org/drawingml/2006/main" xmlns:r="http://schemas.openxmlformats.org/officeDocument/2006/relationships" xmlns:p="http://schemas.openxmlformats.org/presentationml/2006/main">
   <p:cSld>
     <p:spTree>
       <p:nvGrpSpPr>
@@ -5852,7 +6087,14 @@
         <p:cNvGrpSpPr/>
         <p:nvPr/>
       </p:nvGrpSpPr>
-      <p:grpSpPr/>
+      <p:grpSpPr>
+        <a:xfrm>
+          <a:off x="0" y="0"/>
+          <a:ext cx="0" cy="0"/>
+          <a:chOff x="0" y="0"/>
+          <a:chExt cx="0" cy="0"/>
+        </a:xfrm>
+      </p:grpSpPr>
       <p:sp>
         <p:nvSpPr>
           <p:cNvPr id="2" name="TextBox 1"/>
@@ -6045,7 +6287,7 @@
 </file>
 
 <file path=ppt/slides/slide23.xml><?xml version="1.0" encoding="utf-8"?>
-<p:sld xmlns:a="http://schemas.openxmlformats.org/drawingml/2006/main" xmlns:p="http://schemas.openxmlformats.org/presentationml/2006/main" xmlns:r="http://schemas.openxmlformats.org/officeDocument/2006/relationships">
+<p:sld xmlns:a="http://schemas.openxmlformats.org/drawingml/2006/main" xmlns:r="http://schemas.openxmlformats.org/officeDocument/2006/relationships" xmlns:p="http://schemas.openxmlformats.org/presentationml/2006/main">
   <p:cSld>
     <p:spTree>
       <p:nvGrpSpPr>
@@ -6053,7 +6295,14 @@
         <p:cNvGrpSpPr/>
         <p:nvPr/>
       </p:nvGrpSpPr>
-      <p:grpSpPr/>
+      <p:grpSpPr>
+        <a:xfrm>
+          <a:off x="0" y="0"/>
+          <a:ext cx="0" cy="0"/>
+          <a:chOff x="0" y="0"/>
+          <a:chExt cx="0" cy="0"/>
+        </a:xfrm>
+      </p:grpSpPr>
       <p:sp>
         <p:nvSpPr>
           <p:cNvPr id="2" name="TextBox 1"/>
@@ -6118,7 +6367,7 @@
               </a:defRPr>
             </a:pPr>
             <a:r>
-              <a:t>Conclusion</a:t>
+              <a:t>Target Venue &amp; Live Demo</a:t>
             </a:r>
           </a:p>
         </p:txBody>
@@ -6154,7 +6403,8 @@
               </a:defRPr>
             </a:pPr>
             <a:r>
-              <a:t>SearchLens successfully demonstrates that a transparent Python implementation can rival industrial models like BM25.</a:t>
+              <a:rPr dirty="0"/>
+              <a:t>Target Venue: ACM SIGIR 2026 (System Demonstrations)</a:t>
             </a:r>
           </a:p>
           <a:p>
@@ -6167,7 +6417,8 @@
               </a:defRPr>
             </a:pPr>
             <a:r>
-              <a:t>The project proves the importance of term saturation and positional indexing for technical search tasks.</a:t>
+              <a:rPr dirty="0"/>
+              <a:t>SIGIR is the premier venue for Information Retrieval research.</a:t>
             </a:r>
           </a:p>
           <a:p>
@@ -6180,8 +6431,14 @@
               </a:defRPr>
             </a:pPr>
             <a:r>
-              <a:t>The system is demo-ready, fully tested, and reproducible.</a:t>
-            </a:r>
+              <a:rPr dirty="0"/>
+              <a:t>Live Demo URL: https://</a:t>
+            </a:r>
+            <a:r>
+              <a:rPr dirty="0" err="1"/>
+              <a:t>searchlens-demo.onrender.com</a:t>
+            </a:r>
+            <a:endParaRPr dirty="0"/>
           </a:p>
           <a:p>
             <a:pPr>
@@ -6193,7 +6450,50 @@
               </a:defRPr>
             </a:pPr>
             <a:r>
-              <a:t>Ready for submission to ACM SIGIR.</a:t>
+              <a:rPr dirty="0"/>
+              <a:t>Key Demo Features:</a:t>
+            </a:r>
+          </a:p>
+          <a:p>
+            <a:pPr lvl="1">
+              <a:spcAft>
+                <a:spcPts val="1200"/>
+              </a:spcAft>
+              <a:defRPr sz="1800">
+                <a:latin typeface="Times New Roman"/>
+              </a:defRPr>
+            </a:pPr>
+            <a:r>
+              <a:rPr dirty="0"/>
+              <a:t>Real-time BM25 vs TF-IDF ranking comparison.</a:t>
+            </a:r>
+          </a:p>
+          <a:p>
+            <a:pPr lvl="1">
+              <a:spcAft>
+                <a:spcPts val="1200"/>
+              </a:spcAft>
+              <a:defRPr sz="1800">
+                <a:latin typeface="Times New Roman"/>
+              </a:defRPr>
+            </a:pPr>
+            <a:r>
+              <a:rPr dirty="0"/>
+              <a:t>Interactive 'Ranking Intelligence' explanations.</a:t>
+            </a:r>
+          </a:p>
+          <a:p>
+            <a:pPr lvl="1">
+              <a:spcAft>
+                <a:spcPts val="1200"/>
+              </a:spcAft>
+              <a:defRPr sz="1800">
+                <a:latin typeface="Times New Roman"/>
+              </a:defRPr>
+            </a:pPr>
+            <a:r>
+              <a:rPr dirty="0"/>
+              <a:t>Optimized for production via Render &amp; Docker.</a:t>
             </a:r>
           </a:p>
         </p:txBody>
@@ -6207,7 +6507,7 @@
 </file>
 
 <file path=ppt/slides/slide24.xml><?xml version="1.0" encoding="utf-8"?>
-<p:sld xmlns:a="http://schemas.openxmlformats.org/drawingml/2006/main" xmlns:p="http://schemas.openxmlformats.org/presentationml/2006/main" xmlns:r="http://schemas.openxmlformats.org/officeDocument/2006/relationships">
+<p:sld xmlns:a="http://schemas.openxmlformats.org/drawingml/2006/main" xmlns:r="http://schemas.openxmlformats.org/officeDocument/2006/relationships" xmlns:p="http://schemas.openxmlformats.org/presentationml/2006/main">
   <p:cSld>
     <p:spTree>
       <p:nvGrpSpPr>
@@ -6215,7 +6515,14 @@
         <p:cNvGrpSpPr/>
         <p:nvPr/>
       </p:nvGrpSpPr>
-      <p:grpSpPr/>
+      <p:grpSpPr>
+        <a:xfrm>
+          <a:off x="0" y="0"/>
+          <a:ext cx="0" cy="0"/>
+          <a:chOff x="0" y="0"/>
+          <a:chExt cx="0" cy="0"/>
+        </a:xfrm>
+      </p:grpSpPr>
       <p:sp>
         <p:nvSpPr>
           <p:cNvPr id="2" name="TextBox 1"/>
@@ -6257,8 +6564,177 @@
         </p:nvSpPr>
         <p:spPr>
           <a:xfrm>
-            <a:off x="914400" y="2286000"/>
-            <a:ext cx="10360152" cy="2286000"/>
+            <a:off x="731520" y="365760"/>
+            <a:ext cx="10698480" cy="731520"/>
+          </a:xfrm>
+          <a:prstGeom prst="rect">
+            <a:avLst/>
+          </a:prstGeom>
+          <a:noFill/>
+        </p:spPr>
+        <p:txBody>
+          <a:bodyPr wrap="none">
+            <a:spAutoFit/>
+          </a:bodyPr>
+          <a:lstStyle/>
+          <a:p>
+            <a:pPr>
+              <a:defRPr sz="4000" b="1">
+                <a:solidFill>
+                  <a:srgbClr val="000000"/>
+                </a:solidFill>
+                <a:latin typeface="Times New Roman"/>
+              </a:defRPr>
+            </a:pPr>
+            <a:r>
+              <a:t>Conclusion</a:t>
+            </a:r>
+          </a:p>
+        </p:txBody>
+      </p:sp>
+      <p:sp>
+        <p:nvSpPr>
+          <p:cNvPr id="4" name="TextBox 3"/>
+          <p:cNvSpPr txBox="1"/>
+          <p:nvPr/>
+        </p:nvSpPr>
+        <p:spPr>
+          <a:xfrm>
+            <a:off x="731520" y="1371600"/>
+            <a:ext cx="10698480" cy="5029200"/>
+          </a:xfrm>
+          <a:prstGeom prst="rect">
+            <a:avLst/>
+          </a:prstGeom>
+          <a:noFill/>
+        </p:spPr>
+        <p:txBody>
+          <a:bodyPr wrap="square">
+            <a:spAutoFit/>
+          </a:bodyPr>
+          <a:lstStyle/>
+          <a:p>
+            <a:pPr>
+              <a:spcAft>
+                <a:spcPts val="1200"/>
+              </a:spcAft>
+              <a:defRPr sz="2200">
+                <a:latin typeface="Times New Roman"/>
+              </a:defRPr>
+            </a:pPr>
+            <a:r>
+              <a:t>SearchLens successfully demonstrates that a transparent Python implementation can rival industrial models like BM25.</a:t>
+            </a:r>
+          </a:p>
+          <a:p>
+            <a:pPr>
+              <a:spcAft>
+                <a:spcPts val="1200"/>
+              </a:spcAft>
+              <a:defRPr sz="2200">
+                <a:latin typeface="Times New Roman"/>
+              </a:defRPr>
+            </a:pPr>
+            <a:r>
+              <a:t>The project proves the importance of term saturation and positional indexing for technical search tasks.</a:t>
+            </a:r>
+          </a:p>
+          <a:p>
+            <a:pPr>
+              <a:spcAft>
+                <a:spcPts val="1200"/>
+              </a:spcAft>
+              <a:defRPr sz="2200">
+                <a:latin typeface="Times New Roman"/>
+              </a:defRPr>
+            </a:pPr>
+            <a:r>
+              <a:t>The system is demo-ready, fully tested, and reproducible.</a:t>
+            </a:r>
+          </a:p>
+          <a:p>
+            <a:pPr>
+              <a:spcAft>
+                <a:spcPts val="1200"/>
+              </a:spcAft>
+              <a:defRPr sz="2200">
+                <a:latin typeface="Times New Roman"/>
+              </a:defRPr>
+            </a:pPr>
+            <a:r>
+              <a:t>Final URL: https://searchlens-demo.onrender.com</a:t>
+            </a:r>
+          </a:p>
+        </p:txBody>
+      </p:sp>
+    </p:spTree>
+  </p:cSld>
+  <p:clrMapOvr>
+    <a:masterClrMapping/>
+  </p:clrMapOvr>
+</p:sld>
+</file>
+
+<file path=ppt/slides/slide25.xml><?xml version="1.0" encoding="utf-8"?>
+<p:sld xmlns:a="http://schemas.openxmlformats.org/drawingml/2006/main" xmlns:r="http://schemas.openxmlformats.org/officeDocument/2006/relationships" xmlns:p="http://schemas.openxmlformats.org/presentationml/2006/main">
+  <p:cSld>
+    <p:spTree>
+      <p:nvGrpSpPr>
+        <p:cNvPr id="1" name=""/>
+        <p:cNvGrpSpPr/>
+        <p:nvPr/>
+      </p:nvGrpSpPr>
+      <p:grpSpPr>
+        <a:xfrm>
+          <a:off x="0" y="0"/>
+          <a:ext cx="0" cy="0"/>
+          <a:chOff x="0" y="0"/>
+          <a:chExt cx="0" cy="0"/>
+        </a:xfrm>
+      </p:grpSpPr>
+      <p:sp>
+        <p:nvSpPr>
+          <p:cNvPr id="2" name="TextBox 1"/>
+          <p:cNvSpPr txBox="1"/>
+          <p:nvPr/>
+        </p:nvSpPr>
+        <p:spPr>
+          <a:xfrm>
+            <a:off x="10515600" y="6400800"/>
+            <a:ext cx="1371600" cy="365760"/>
+          </a:xfrm>
+          <a:prstGeom prst="rect">
+            <a:avLst/>
+          </a:prstGeom>
+          <a:noFill/>
+        </p:spPr>
+        <p:txBody>
+          <a:bodyPr wrap="none">
+            <a:spAutoFit/>
+          </a:bodyPr>
+          <a:lstStyle/>
+          <a:p>
+            <a:pPr algn="r">
+              <a:defRPr sz="1200">
+                <a:latin typeface="Times New Roman"/>
+              </a:defRPr>
+            </a:pPr>
+            <a:r>
+              <a:t>Slide 25</a:t>
+            </a:r>
+          </a:p>
+        </p:txBody>
+      </p:sp>
+      <p:sp>
+        <p:nvSpPr>
+          <p:cNvPr id="3" name="TextBox 2"/>
+          <p:cNvSpPr txBox="1"/>
+          <p:nvPr/>
+        </p:nvSpPr>
+        <p:spPr>
+          <a:xfrm>
+            <a:off x="3638675" y="2286000"/>
+            <a:ext cx="4911601" cy="1384995"/>
           </a:xfrm>
           <a:prstGeom prst="rect">
             <a:avLst/>
@@ -6280,30 +6756,8 @@
               </a:defRPr>
             </a:pPr>
             <a:r>
+              <a:rPr dirty="0"/>
               <a:t>Thank You</a:t>
-            </a:r>
-          </a:p>
-          <a:p>
-            <a:pPr algn="ctr">
-              <a:defRPr sz="3200">
-                <a:latin typeface="Times New Roman"/>
-              </a:defRPr>
-            </a:pPr>
-            <a:r>
-              <a:t>Questions &amp; Discussion</a:t>
-            </a:r>
-          </a:p>
-          <a:p>
-            <a:pPr algn="ctr">
-              <a:defRPr sz="2000">
-                <a:solidFill>
-                  <a:srgbClr val="000000"/>
-                </a:solidFill>
-                <a:latin typeface="Times New Roman"/>
-              </a:defRPr>
-            </a:pPr>
-            <a:r>
-              <a:t>karthik.kovi@student.csulb.edu</a:t>
             </a:r>
           </a:p>
         </p:txBody>
@@ -6317,7 +6771,7 @@
 </file>
 
 <file path=ppt/slides/slide3.xml><?xml version="1.0" encoding="utf-8"?>
-<p:sld xmlns:a="http://schemas.openxmlformats.org/drawingml/2006/main" xmlns:p="http://schemas.openxmlformats.org/presentationml/2006/main" xmlns:r="http://schemas.openxmlformats.org/officeDocument/2006/relationships">
+<p:sld xmlns:a="http://schemas.openxmlformats.org/drawingml/2006/main" xmlns:r="http://schemas.openxmlformats.org/officeDocument/2006/relationships" xmlns:p="http://schemas.openxmlformats.org/presentationml/2006/main">
   <p:cSld>
     <p:spTree>
       <p:nvGrpSpPr>
@@ -6325,7 +6779,14 @@
         <p:cNvGrpSpPr/>
         <p:nvPr/>
       </p:nvGrpSpPr>
-      <p:grpSpPr/>
+      <p:grpSpPr>
+        <a:xfrm>
+          <a:off x="0" y="0"/>
+          <a:ext cx="0" cy="0"/>
+          <a:chOff x="0" y="0"/>
+          <a:chExt cx="0" cy="0"/>
+        </a:xfrm>
+      </p:grpSpPr>
       <p:sp>
         <p:nvSpPr>
           <p:cNvPr id="2" name="TextBox 1"/>
@@ -6426,6 +6887,7 @@
               </a:defRPr>
             </a:pPr>
             <a:r>
+              <a:rPr dirty="0"/>
               <a:t>At its simplest, a search engine is a 'find' tool on steroids.</a:t>
             </a:r>
           </a:p>
@@ -6439,6 +6901,7 @@
               </a:defRPr>
             </a:pPr>
             <a:r>
+              <a:rPr dirty="0"/>
               <a:t>It solves three massive problems:</a:t>
             </a:r>
           </a:p>
@@ -6452,6 +6915,7 @@
               </a:defRPr>
             </a:pPr>
             <a:r>
+              <a:rPr dirty="0"/>
               <a:t>1. Speed: How to find data in milliseconds across millions of files.</a:t>
             </a:r>
           </a:p>
@@ -6465,6 +6929,7 @@
               </a:defRPr>
             </a:pPr>
             <a:r>
+              <a:rPr dirty="0"/>
               <a:t>2. Precision: How to make sure the best result is at the top.</a:t>
             </a:r>
           </a:p>
@@ -6478,6 +6943,7 @@
               </a:defRPr>
             </a:pPr>
             <a:r>
+              <a:rPr dirty="0"/>
               <a:t>3. Language: How to handle typos, phrases, and word meanings.</a:t>
             </a:r>
           </a:p>
@@ -6491,7 +6957,12 @@
               </a:defRPr>
             </a:pPr>
             <a:r>
-              <a:t>SearchLens focuses on the 'Ranked Retrieval' paradigm.</a:t>
+              <a:rPr dirty="0" err="1"/>
+              <a:t>SearchLens</a:t>
+            </a:r>
+            <a:r>
+              <a:rPr dirty="0"/>
+              <a:t> focuses on the 'Ranked Retrieval' paradigm.</a:t>
             </a:r>
           </a:p>
         </p:txBody>
@@ -6505,7 +6976,7 @@
 </file>
 
 <file path=ppt/slides/slide4.xml><?xml version="1.0" encoding="utf-8"?>
-<p:sld xmlns:a="http://schemas.openxmlformats.org/drawingml/2006/main" xmlns:p="http://schemas.openxmlformats.org/presentationml/2006/main" xmlns:r="http://schemas.openxmlformats.org/officeDocument/2006/relationships">
+<p:sld xmlns:a="http://schemas.openxmlformats.org/drawingml/2006/main" xmlns:r="http://schemas.openxmlformats.org/officeDocument/2006/relationships" xmlns:p="http://schemas.openxmlformats.org/presentationml/2006/main">
   <p:cSld>
     <p:spTree>
       <p:nvGrpSpPr>
@@ -6513,7 +6984,14 @@
         <p:cNvGrpSpPr/>
         <p:nvPr/>
       </p:nvGrpSpPr>
-      <p:grpSpPr/>
+      <p:grpSpPr>
+        <a:xfrm>
+          <a:off x="0" y="0"/>
+          <a:ext cx="0" cy="0"/>
+          <a:chOff x="0" y="0"/>
+          <a:chExt cx="0" cy="0"/>
+        </a:xfrm>
+      </p:grpSpPr>
       <p:sp>
         <p:nvSpPr>
           <p:cNvPr id="2" name="TextBox 1"/>
@@ -6592,7 +7070,7 @@
         <p:spPr>
           <a:xfrm>
             <a:off x="731520" y="1371600"/>
-            <a:ext cx="10698480" cy="5029200"/>
+            <a:ext cx="10698480" cy="1908215"/>
           </a:xfrm>
           <a:prstGeom prst="rect">
             <a:avLst/>
@@ -6605,54 +7083,66 @@
           </a:bodyPr>
           <a:lstStyle/>
           <a:p>
-            <a:pPr>
-              <a:spcAft>
-                <a:spcPts val="1200"/>
-              </a:spcAft>
+            <a:pPr marL="342900" indent="-342900">
+              <a:spcAft>
+                <a:spcPts val="1200"/>
+              </a:spcAft>
+              <a:buFont typeface="Arial" panose="020B0604020202020204" pitchFamily="34" charset="0"/>
+              <a:buChar char="•"/>
               <a:defRPr sz="2200">
                 <a:latin typeface="Times New Roman"/>
               </a:defRPr>
             </a:pPr>
             <a:r>
+              <a:rPr dirty="0"/>
               <a:t>Modern search is dominated by 'Black Box' libraries (Lucene, Elasticsearch).</a:t>
             </a:r>
           </a:p>
           <a:p>
-            <a:pPr>
-              <a:spcAft>
-                <a:spcPts val="1200"/>
-              </a:spcAft>
+            <a:pPr marL="342900" indent="-342900">
+              <a:spcAft>
+                <a:spcPts val="1200"/>
+              </a:spcAft>
+              <a:buFont typeface="Arial" panose="020B0604020202020204" pitchFamily="34" charset="0"/>
+              <a:buChar char="•"/>
               <a:defRPr sz="2200">
                 <a:latin typeface="Times New Roman"/>
               </a:defRPr>
             </a:pPr>
             <a:r>
+              <a:rPr dirty="0"/>
               <a:t>Understanding the 'lexical core' is essential for hybrid AI search.</a:t>
             </a:r>
           </a:p>
           <a:p>
-            <a:pPr>
-              <a:spcAft>
-                <a:spcPts val="1200"/>
-              </a:spcAft>
+            <a:pPr marL="342900" indent="-342900">
+              <a:spcAft>
+                <a:spcPts val="1200"/>
+              </a:spcAft>
+              <a:buFont typeface="Arial" panose="020B0604020202020204" pitchFamily="34" charset="0"/>
+              <a:buChar char="•"/>
               <a:defRPr sz="2200">
                 <a:latin typeface="Times New Roman"/>
               </a:defRPr>
             </a:pPr>
             <a:r>
+              <a:rPr dirty="0"/>
               <a:t>Bridging the Gap: Connecting classroom theory to runnable, inspectable Python code.</a:t>
             </a:r>
           </a:p>
           <a:p>
-            <a:pPr>
-              <a:spcAft>
-                <a:spcPts val="1200"/>
-              </a:spcAft>
+            <a:pPr marL="342900" indent="-342900">
+              <a:spcAft>
+                <a:spcPts val="1200"/>
+              </a:spcAft>
+              <a:buFont typeface="Arial" panose="020B0604020202020204" pitchFamily="34" charset="0"/>
+              <a:buChar char="•"/>
               <a:defRPr sz="2200">
                 <a:latin typeface="Times New Roman"/>
               </a:defRPr>
             </a:pPr>
             <a:r>
+              <a:rPr dirty="0"/>
               <a:t>Reproducibility: Proving that BM25 outperforms TF-IDF on technical data.</a:t>
             </a:r>
           </a:p>
@@ -6667,7 +7157,7 @@
 </file>
 
 <file path=ppt/slides/slide5.xml><?xml version="1.0" encoding="utf-8"?>
-<p:sld xmlns:a="http://schemas.openxmlformats.org/drawingml/2006/main" xmlns:p="http://schemas.openxmlformats.org/presentationml/2006/main" xmlns:r="http://schemas.openxmlformats.org/officeDocument/2006/relationships">
+<p:sld xmlns:a="http://schemas.openxmlformats.org/drawingml/2006/main" xmlns:r="http://schemas.openxmlformats.org/officeDocument/2006/relationships" xmlns:p="http://schemas.openxmlformats.org/presentationml/2006/main">
   <p:cSld>
     <p:spTree>
       <p:nvGrpSpPr>
@@ -6675,7 +7165,14 @@
         <p:cNvGrpSpPr/>
         <p:nvPr/>
       </p:nvGrpSpPr>
-      <p:grpSpPr/>
+      <p:grpSpPr>
+        <a:xfrm>
+          <a:off x="0" y="0"/>
+          <a:ext cx="0" cy="0"/>
+          <a:chOff x="0" y="0"/>
+          <a:chExt cx="0" cy="0"/>
+        </a:xfrm>
+      </p:grpSpPr>
       <p:sp>
         <p:nvSpPr>
           <p:cNvPr id="2" name="TextBox 1"/>
@@ -6855,7 +7352,7 @@
 </file>
 
 <file path=ppt/slides/slide6.xml><?xml version="1.0" encoding="utf-8"?>
-<p:sld xmlns:a="http://schemas.openxmlformats.org/drawingml/2006/main" xmlns:p="http://schemas.openxmlformats.org/presentationml/2006/main" xmlns:r="http://schemas.openxmlformats.org/officeDocument/2006/relationships">
+<p:sld xmlns:a="http://schemas.openxmlformats.org/drawingml/2006/main" xmlns:r="http://schemas.openxmlformats.org/officeDocument/2006/relationships" xmlns:p="http://schemas.openxmlformats.org/presentationml/2006/main">
   <p:cSld>
     <p:spTree>
       <p:nvGrpSpPr>
@@ -6863,7 +7360,14 @@
         <p:cNvGrpSpPr/>
         <p:nvPr/>
       </p:nvGrpSpPr>
-      <p:grpSpPr/>
+      <p:grpSpPr>
+        <a:xfrm>
+          <a:off x="0" y="0"/>
+          <a:ext cx="0" cy="0"/>
+          <a:chOff x="0" y="0"/>
+          <a:chExt cx="0" cy="0"/>
+        </a:xfrm>
+      </p:grpSpPr>
       <p:sp>
         <p:nvSpPr>
           <p:cNvPr id="2" name="TextBox 1"/>
@@ -6942,7 +7446,7 @@
         <p:spPr>
           <a:xfrm>
             <a:off x="731520" y="1371600"/>
-            <a:ext cx="6400800" cy="5029200"/>
+            <a:ext cx="6400800" cy="2431435"/>
           </a:xfrm>
           <a:prstGeom prst="rect">
             <a:avLst/>
@@ -6955,41 +7459,50 @@
           </a:bodyPr>
           <a:lstStyle/>
           <a:p>
-            <a:pPr>
-              <a:spcAft>
-                <a:spcPts val="1200"/>
-              </a:spcAft>
+            <a:pPr marL="342900" indent="-342900">
+              <a:spcAft>
+                <a:spcPts val="1200"/>
+              </a:spcAft>
+              <a:buFont typeface="Arial" panose="020B0604020202020204" pitchFamily="34" charset="0"/>
+              <a:buChar char="•"/>
               <a:defRPr sz="2200">
                 <a:latin typeface="Times New Roman"/>
               </a:defRPr>
             </a:pPr>
             <a:r>
+              <a:rPr dirty="0"/>
               <a:t>Searching every file for a word is slow (O(N)).</a:t>
             </a:r>
           </a:p>
           <a:p>
-            <a:pPr>
-              <a:spcAft>
-                <a:spcPts val="1200"/>
-              </a:spcAft>
+            <a:pPr marL="342900" indent="-342900">
+              <a:spcAft>
+                <a:spcPts val="1200"/>
+              </a:spcAft>
+              <a:buFont typeface="Arial" panose="020B0604020202020204" pitchFamily="34" charset="0"/>
+              <a:buChar char="•"/>
               <a:defRPr sz="2200">
                 <a:latin typeface="Times New Roman"/>
               </a:defRPr>
             </a:pPr>
             <a:r>
+              <a:rPr dirty="0"/>
               <a:t>An Inverted Index maps words to their locations upfront (O(1)).</a:t>
             </a:r>
           </a:p>
           <a:p>
-            <a:pPr>
-              <a:spcAft>
-                <a:spcPts val="1200"/>
-              </a:spcAft>
+            <a:pPr marL="342900" indent="-342900">
+              <a:spcAft>
+                <a:spcPts val="1200"/>
+              </a:spcAft>
+              <a:buFont typeface="Arial" panose="020B0604020202020204" pitchFamily="34" charset="0"/>
+              <a:buChar char="•"/>
               <a:defRPr sz="2200">
                 <a:latin typeface="Times New Roman"/>
               </a:defRPr>
             </a:pPr>
             <a:r>
+              <a:rPr dirty="0"/>
               <a:t>Positional Indexing: We don't just store which document has a word; we store the EXACT position of that word in the text.</a:t>
             </a:r>
           </a:p>
@@ -7028,7 +7541,7 @@
 </file>
 
 <file path=ppt/slides/slide7.xml><?xml version="1.0" encoding="utf-8"?>
-<p:sld xmlns:a="http://schemas.openxmlformats.org/drawingml/2006/main" xmlns:p="http://schemas.openxmlformats.org/presentationml/2006/main" xmlns:r="http://schemas.openxmlformats.org/officeDocument/2006/relationships">
+<p:sld xmlns:a="http://schemas.openxmlformats.org/drawingml/2006/main" xmlns:r="http://schemas.openxmlformats.org/officeDocument/2006/relationships" xmlns:p="http://schemas.openxmlformats.org/presentationml/2006/main">
   <p:cSld>
     <p:spTree>
       <p:nvGrpSpPr>
@@ -7036,7 +7549,14 @@
         <p:cNvGrpSpPr/>
         <p:nvPr/>
       </p:nvGrpSpPr>
-      <p:grpSpPr/>
+      <p:grpSpPr>
+        <a:xfrm>
+          <a:off x="0" y="0"/>
+          <a:ext cx="0" cy="0"/>
+          <a:chOff x="0" y="0"/>
+          <a:chExt cx="0" cy="0"/>
+        </a:xfrm>
+      </p:grpSpPr>
       <p:sp>
         <p:nvSpPr>
           <p:cNvPr id="2" name="TextBox 1"/>
@@ -7227,7 +7747,7 @@
 </file>
 
 <file path=ppt/slides/slide8.xml><?xml version="1.0" encoding="utf-8"?>
-<p:sld xmlns:a="http://schemas.openxmlformats.org/drawingml/2006/main" xmlns:p="http://schemas.openxmlformats.org/presentationml/2006/main" xmlns:r="http://schemas.openxmlformats.org/officeDocument/2006/relationships">
+<p:sld xmlns:a="http://schemas.openxmlformats.org/drawingml/2006/main" xmlns:r="http://schemas.openxmlformats.org/officeDocument/2006/relationships" xmlns:p="http://schemas.openxmlformats.org/presentationml/2006/main">
   <p:cSld>
     <p:spTree>
       <p:nvGrpSpPr>
@@ -7235,7 +7755,14 @@
         <p:cNvGrpSpPr/>
         <p:nvPr/>
       </p:nvGrpSpPr>
-      <p:grpSpPr/>
+      <p:grpSpPr>
+        <a:xfrm>
+          <a:off x="0" y="0"/>
+          <a:ext cx="0" cy="0"/>
+          <a:chOff x="0" y="0"/>
+          <a:chExt cx="0" cy="0"/>
+        </a:xfrm>
+      </p:grpSpPr>
       <p:sp>
         <p:nvSpPr>
           <p:cNvPr id="2" name="TextBox 1"/>
@@ -7338,7 +7865,7 @@
 </file>
 
 <file path=ppt/slides/slide9.xml><?xml version="1.0" encoding="utf-8"?>
-<p:sld xmlns:a="http://schemas.openxmlformats.org/drawingml/2006/main" xmlns:p="http://schemas.openxmlformats.org/presentationml/2006/main" xmlns:r="http://schemas.openxmlformats.org/officeDocument/2006/relationships">
+<p:sld xmlns:a="http://schemas.openxmlformats.org/drawingml/2006/main" xmlns:r="http://schemas.openxmlformats.org/officeDocument/2006/relationships" xmlns:p="http://schemas.openxmlformats.org/presentationml/2006/main">
   <p:cSld>
     <p:spTree>
       <p:nvGrpSpPr>
@@ -7346,7 +7873,14 @@
         <p:cNvGrpSpPr/>
         <p:nvPr/>
       </p:nvGrpSpPr>
-      <p:grpSpPr/>
+      <p:grpSpPr>
+        <a:xfrm>
+          <a:off x="0" y="0"/>
+          <a:ext cx="0" cy="0"/>
+          <a:chOff x="0" y="0"/>
+          <a:chExt cx="0" cy="0"/>
+        </a:xfrm>
+      </p:grpSpPr>
       <p:sp>
         <p:nvSpPr>
           <p:cNvPr id="2" name="TextBox 1"/>
